--- a/Presentations and Reports/FinalPresentation_V1.pptx
+++ b/Presentations and Reports/FinalPresentation_V1.pptx
@@ -5,20 +5,27 @@
     <p:sldMasterId id="2147483660" r:id="rId1"/>
   </p:sldMasterIdLst>
   <p:notesMasterIdLst>
-    <p:notesMasterId r:id="rId13"/>
+    <p:notesMasterId r:id="rId20"/>
   </p:notesMasterIdLst>
   <p:sldIdLst>
     <p:sldId id="256" r:id="rId2"/>
-    <p:sldId id="269" r:id="rId3"/>
-    <p:sldId id="261" r:id="rId4"/>
-    <p:sldId id="265" r:id="rId5"/>
-    <p:sldId id="266" r:id="rId6"/>
-    <p:sldId id="267" r:id="rId7"/>
-    <p:sldId id="268" r:id="rId8"/>
-    <p:sldId id="264" r:id="rId9"/>
-    <p:sldId id="262" r:id="rId10"/>
-    <p:sldId id="263" r:id="rId11"/>
-    <p:sldId id="260" r:id="rId12"/>
+    <p:sldId id="277" r:id="rId3"/>
+    <p:sldId id="279" r:id="rId4"/>
+    <p:sldId id="280" r:id="rId5"/>
+    <p:sldId id="272" r:id="rId6"/>
+    <p:sldId id="274" r:id="rId7"/>
+    <p:sldId id="269" r:id="rId8"/>
+    <p:sldId id="275" r:id="rId9"/>
+    <p:sldId id="276" r:id="rId10"/>
+    <p:sldId id="261" r:id="rId11"/>
+    <p:sldId id="265" r:id="rId12"/>
+    <p:sldId id="266" r:id="rId13"/>
+    <p:sldId id="267" r:id="rId14"/>
+    <p:sldId id="268" r:id="rId15"/>
+    <p:sldId id="264" r:id="rId16"/>
+    <p:sldId id="262" r:id="rId17"/>
+    <p:sldId id="263" r:id="rId18"/>
+    <p:sldId id="260" r:id="rId19"/>
   </p:sldIdLst>
   <p:sldSz cx="12192000" cy="6858000"/>
   <p:notesSz cx="6858000" cy="9144000"/>
@@ -125,9 +132,24 @@
             <p14:sldId id="256"/>
           </p14:sldIdLst>
         </p14:section>
+        <p14:section name="Motivation &amp; Background" id="{A37E43A8-F445-46BC-8506-F113BA736BA5}">
+          <p14:sldIdLst>
+            <p14:sldId id="277"/>
+            <p14:sldId id="279"/>
+            <p14:sldId id="280"/>
+          </p14:sldIdLst>
+        </p14:section>
+        <p14:section name="Defining Target Variable" id="{535C0DD9-9B7B-4736-849D-AFCADC8528C9}">
+          <p14:sldIdLst>
+            <p14:sldId id="272"/>
+            <p14:sldId id="274"/>
+          </p14:sldIdLst>
+        </p14:section>
         <p14:section name="Evaluating Models" id="{E04533C1-A84C-4883-954F-B9A2CF0C89FE}">
           <p14:sldIdLst>
             <p14:sldId id="269"/>
+            <p14:sldId id="275"/>
+            <p14:sldId id="276"/>
             <p14:sldId id="261"/>
             <p14:sldId id="265"/>
             <p14:sldId id="266"/>
@@ -144,6 +166,9 @@
           </p14:sldIdLst>
         </p14:section>
       </p14:sectionLst>
+    </p:ext>
+    <p:ext uri="{EFAFB233-063F-42B5-8137-9DF3F51BA10A}">
+      <p15:sldGuideLst xmlns:p15="http://schemas.microsoft.com/office/powerpoint/2012/main"/>
     </p:ext>
   </p:extLst>
 </p:presentation>
@@ -6238,7 +6263,14 @@
           <a:bodyPr/>
           <a:lstStyle/>
           <a:p>
-            <a:endParaRPr lang="en-CA"/>
+            <a:r>
+              <a:rPr lang="en-CA" b="1" dirty="0">
+                <a:solidFill>
+                  <a:schemeClr val="tx1"/>
+                </a:solidFill>
+              </a:rPr>
+              <a:t>Professor Power Index</a:t>
+            </a:r>
           </a:p>
         </p:txBody>
       </p:sp>
@@ -6260,10 +6292,44 @@
         </p:nvSpPr>
         <p:spPr/>
         <p:txBody>
-          <a:bodyPr/>
+          <a:bodyPr>
+            <a:normAutofit lnSpcReduction="10000"/>
+          </a:bodyPr>
           <a:lstStyle/>
           <a:p>
-            <a:endParaRPr lang="en-CA"/>
+            <a:r>
+              <a:rPr lang="en-CA" dirty="0"/>
+              <a:t>Kelly-Marie </a:t>
+            </a:r>
+            <a:r>
+              <a:rPr lang="en-CA" dirty="0" err="1"/>
+              <a:t>Yokuda</a:t>
+            </a:r>
+            <a:endParaRPr lang="en-CA" dirty="0"/>
+          </a:p>
+          <a:p>
+            <a:r>
+              <a:rPr lang="en-CA" dirty="0"/>
+              <a:t>April 11</a:t>
+            </a:r>
+            <a:r>
+              <a:rPr lang="en-CA" baseline="30000" dirty="0"/>
+              <a:t>th</a:t>
+            </a:r>
+            <a:r>
+              <a:rPr lang="en-CA" dirty="0"/>
+              <a:t>, 2023</a:t>
+            </a:r>
+          </a:p>
+          <a:p>
+            <a:r>
+              <a:rPr lang="en-CA" dirty="0" err="1"/>
+              <a:t>BrainStation</a:t>
+            </a:r>
+            <a:r>
+              <a:rPr lang="en-CA" dirty="0"/>
+              <a:t> Capstone Final Presentation</a:t>
+            </a:r>
           </a:p>
         </p:txBody>
       </p:sp>
@@ -6296,6 +6362,114 @@
           </a:p>
         </p:txBody>
       </p:sp>
+      <p:grpSp>
+        <p:nvGrpSpPr>
+          <p:cNvPr id="6" name="Group 5">
+            <a:extLst>
+              <a:ext uri="{FF2B5EF4-FFF2-40B4-BE49-F238E27FC236}">
+                <a16:creationId xmlns:a16="http://schemas.microsoft.com/office/drawing/2014/main" id="{E8668F3F-B8EE-5207-5981-E210D73B0E56}"/>
+              </a:ext>
+            </a:extLst>
+          </p:cNvPr>
+          <p:cNvGrpSpPr/>
+          <p:nvPr/>
+        </p:nvGrpSpPr>
+        <p:grpSpPr>
+          <a:xfrm>
+            <a:off x="260060" y="5645084"/>
+            <a:ext cx="3716323" cy="578840"/>
+            <a:chOff x="176170" y="5462522"/>
+            <a:chExt cx="3716323" cy="578840"/>
+          </a:xfrm>
+        </p:grpSpPr>
+        <p:pic>
+          <p:nvPicPr>
+            <p:cNvPr id="1026" name="Picture 2" descr="LinkedIn icon Logo PNG Transparent &amp; SVG Vector - Freebie Supply">
+              <a:extLst>
+                <a:ext uri="{FF2B5EF4-FFF2-40B4-BE49-F238E27FC236}">
+                  <a16:creationId xmlns:a16="http://schemas.microsoft.com/office/drawing/2014/main" id="{D390E6B4-2940-AF76-D287-936978C8B65D}"/>
+                </a:ext>
+              </a:extLst>
+            </p:cNvPr>
+            <p:cNvPicPr>
+              <a:picLocks noChangeAspect="1" noChangeArrowheads="1"/>
+            </p:cNvPicPr>
+            <p:nvPr/>
+          </p:nvPicPr>
+          <p:blipFill>
+            <a:blip r:embed="rId2">
+              <a:extLst>
+                <a:ext uri="{28A0092B-C50C-407E-A947-70E740481C1C}">
+                  <a14:useLocalDpi xmlns:a14="http://schemas.microsoft.com/office/drawing/2010/main" val="0"/>
+                </a:ext>
+              </a:extLst>
+            </a:blip>
+            <a:srcRect/>
+            <a:stretch>
+              <a:fillRect/>
+            </a:stretch>
+          </p:blipFill>
+          <p:spPr bwMode="auto">
+            <a:xfrm>
+              <a:off x="176170" y="5462522"/>
+              <a:ext cx="578840" cy="578840"/>
+            </a:xfrm>
+            <a:prstGeom prst="rect">
+              <a:avLst/>
+            </a:prstGeom>
+            <a:noFill/>
+            <a:extLst>
+              <a:ext uri="{909E8E84-426E-40DD-AFC4-6F175D3DCCD1}">
+                <a14:hiddenFill xmlns:a14="http://schemas.microsoft.com/office/drawing/2010/main">
+                  <a:solidFill>
+                    <a:srgbClr val="FFFFFF"/>
+                  </a:solidFill>
+                </a14:hiddenFill>
+              </a:ext>
+            </a:extLst>
+          </p:spPr>
+        </p:pic>
+        <p:sp>
+          <p:nvSpPr>
+            <p:cNvPr id="5" name="TextBox 4">
+              <a:extLst>
+                <a:ext uri="{FF2B5EF4-FFF2-40B4-BE49-F238E27FC236}">
+                  <a16:creationId xmlns:a16="http://schemas.microsoft.com/office/drawing/2014/main" id="{A5A4436B-3AA9-A90D-4EE7-A6419B7F0BA1}"/>
+                </a:ext>
+              </a:extLst>
+            </p:cNvPr>
+            <p:cNvSpPr txBox="1"/>
+            <p:nvPr/>
+          </p:nvSpPr>
+          <p:spPr>
+            <a:xfrm>
+              <a:off x="755010" y="5567276"/>
+              <a:ext cx="3137483" cy="369332"/>
+            </a:xfrm>
+            <a:prstGeom prst="rect">
+              <a:avLst/>
+            </a:prstGeom>
+            <a:noFill/>
+          </p:spPr>
+          <p:txBody>
+            <a:bodyPr wrap="square" rtlCol="0">
+              <a:spAutoFit/>
+            </a:bodyPr>
+            <a:lstStyle/>
+            <a:p>
+              <a:r>
+                <a:rPr lang="en-CA" dirty="0"/>
+                <a:t>in/</a:t>
+              </a:r>
+              <a:r>
+                <a:rPr lang="en-CA" dirty="0" err="1"/>
+                <a:t>yokudak</a:t>
+              </a:r>
+              <a:endParaRPr lang="en-CA" dirty="0"/>
+            </a:p>
+          </p:txBody>
+        </p:sp>
+      </p:grpSp>
     </p:spTree>
     <p:extLst>
       <p:ext uri="{BB962C8B-B14F-4D97-AF65-F5344CB8AC3E}">
@@ -6310,862 +6484,6 @@
 </file>
 
 <file path=ppt/slides/slide10.xml><?xml version="1.0" encoding="utf-8"?>
-<p:sld xmlns:a="http://schemas.openxmlformats.org/drawingml/2006/main" xmlns:r="http://schemas.openxmlformats.org/officeDocument/2006/relationships" xmlns:p="http://schemas.openxmlformats.org/presentationml/2006/main">
-  <p:cSld>
-    <p:bg>
-      <p:bgPr>
-        <a:solidFill>
-          <a:schemeClr val="bg1"/>
-        </a:solidFill>
-        <a:effectLst/>
-      </p:bgPr>
-    </p:bg>
-    <p:spTree>
-      <p:nvGrpSpPr>
-        <p:cNvPr id="1" name=""/>
-        <p:cNvGrpSpPr/>
-        <p:nvPr/>
-      </p:nvGrpSpPr>
-      <p:grpSpPr>
-        <a:xfrm>
-          <a:off x="0" y="0"/>
-          <a:ext cx="0" cy="0"/>
-          <a:chOff x="0" y="0"/>
-          <a:chExt cx="0" cy="0"/>
-        </a:xfrm>
-      </p:grpSpPr>
-      <p:sp>
-        <p:nvSpPr>
-          <p:cNvPr id="2" name="Title 1">
-            <a:extLst>
-              <a:ext uri="{FF2B5EF4-FFF2-40B4-BE49-F238E27FC236}">
-                <a16:creationId xmlns:a16="http://schemas.microsoft.com/office/drawing/2014/main" id="{437B3693-1A79-34B5-944C-B789F8A7F8D5}"/>
-              </a:ext>
-            </a:extLst>
-          </p:cNvPr>
-          <p:cNvSpPr>
-            <a:spLocks noGrp="1"/>
-          </p:cNvSpPr>
-          <p:nvPr>
-            <p:ph type="title"/>
-          </p:nvPr>
-        </p:nvSpPr>
-        <p:spPr>
-          <a:xfrm>
-            <a:off x="186486" y="0"/>
-            <a:ext cx="7357336" cy="1516185"/>
-          </a:xfrm>
-        </p:spPr>
-        <p:txBody>
-          <a:bodyPr vert="horz" lIns="91440" tIns="45720" rIns="91440" bIns="45720" rtlCol="0" anchor="b">
-            <a:normAutofit/>
-          </a:bodyPr>
-          <a:lstStyle/>
-          <a:p>
-            <a:r>
-              <a:rPr lang="en-US" sz="4800" kern="1200" dirty="0">
-                <a:solidFill>
-                  <a:schemeClr val="tx1"/>
-                </a:solidFill>
-                <a:latin typeface="+mj-lt"/>
-                <a:ea typeface="+mj-ea"/>
-                <a:cs typeface="+mj-cs"/>
-              </a:rPr>
-              <a:t>Evaluating Models</a:t>
-            </a:r>
-          </a:p>
-        </p:txBody>
-      </p:sp>
-      <p:pic>
-        <p:nvPicPr>
-          <p:cNvPr id="18" name="Picture 17" descr="A picture containing chart&#10;&#10;Description automatically generated">
-            <a:extLst>
-              <a:ext uri="{FF2B5EF4-FFF2-40B4-BE49-F238E27FC236}">
-                <a16:creationId xmlns:a16="http://schemas.microsoft.com/office/drawing/2014/main" id="{B3512374-9F7B-B2E8-0C5A-C35697E51136}"/>
-              </a:ext>
-            </a:extLst>
-          </p:cNvPr>
-          <p:cNvPicPr>
-            <a:picLocks noChangeAspect="1"/>
-          </p:cNvPicPr>
-          <p:nvPr/>
-        </p:nvPicPr>
-        <p:blipFill>
-          <a:blip r:embed="rId2">
-            <a:extLst>
-              <a:ext uri="{28A0092B-C50C-407E-A947-70E740481C1C}">
-                <a14:useLocalDpi xmlns:a14="http://schemas.microsoft.com/office/drawing/2010/main" val="0"/>
-              </a:ext>
-            </a:extLst>
-          </a:blip>
-          <a:stretch>
-            <a:fillRect/>
-          </a:stretch>
-        </p:blipFill>
-        <p:spPr>
-          <a:xfrm>
-            <a:off x="2784475" y="1880118"/>
-            <a:ext cx="2161359" cy="396357"/>
-          </a:xfrm>
-          <a:prstGeom prst="rect">
-            <a:avLst/>
-          </a:prstGeom>
-        </p:spPr>
-      </p:pic>
-      <p:pic>
-        <p:nvPicPr>
-          <p:cNvPr id="20" name="Picture 19">
-            <a:extLst>
-              <a:ext uri="{FF2B5EF4-FFF2-40B4-BE49-F238E27FC236}">
-                <a16:creationId xmlns:a16="http://schemas.microsoft.com/office/drawing/2014/main" id="{1DD35B9C-9E4D-5FB5-2DAD-ED946E6E3AE3}"/>
-              </a:ext>
-            </a:extLst>
-          </p:cNvPr>
-          <p:cNvPicPr>
-            <a:picLocks noChangeAspect="1"/>
-          </p:cNvPicPr>
-          <p:nvPr/>
-        </p:nvPicPr>
-        <p:blipFill>
-          <a:blip r:embed="rId3">
-            <a:extLst>
-              <a:ext uri="{28A0092B-C50C-407E-A947-70E740481C1C}">
-                <a14:useLocalDpi xmlns:a14="http://schemas.microsoft.com/office/drawing/2010/main" val="0"/>
-              </a:ext>
-            </a:extLst>
-          </a:blip>
-          <a:srcRect/>
-          <a:stretch/>
-        </p:blipFill>
-        <p:spPr>
-          <a:xfrm>
-            <a:off x="422350" y="1828790"/>
-            <a:ext cx="5029210" cy="5029210"/>
-          </a:xfrm>
-          <a:prstGeom prst="rect">
-            <a:avLst/>
-          </a:prstGeom>
-        </p:spPr>
-      </p:pic>
-      <p:sp>
-        <p:nvSpPr>
-          <p:cNvPr id="21" name="TextBox 20">
-            <a:extLst>
-              <a:ext uri="{FF2B5EF4-FFF2-40B4-BE49-F238E27FC236}">
-                <a16:creationId xmlns:a16="http://schemas.microsoft.com/office/drawing/2014/main" id="{3D3D6041-190D-6FD1-A24A-E329520E1D6A}"/>
-              </a:ext>
-            </a:extLst>
-          </p:cNvPr>
-          <p:cNvSpPr txBox="1"/>
-          <p:nvPr/>
-        </p:nvSpPr>
-        <p:spPr>
-          <a:xfrm>
-            <a:off x="5228593" y="1520811"/>
-            <a:ext cx="4447252" cy="4832092"/>
-          </a:xfrm>
-          <a:prstGeom prst="rect">
-            <a:avLst/>
-          </a:prstGeom>
-          <a:noFill/>
-        </p:spPr>
-        <p:txBody>
-          <a:bodyPr wrap="square" rtlCol="0">
-            <a:spAutoFit/>
-          </a:bodyPr>
-          <a:lstStyle/>
-          <a:p>
-            <a:pPr algn="ctr"/>
-            <a:r>
-              <a:rPr lang="en-CA" sz="2800" b="1" u="sng" dirty="0"/>
-              <a:t>General Findings</a:t>
-            </a:r>
-          </a:p>
-          <a:p>
-            <a:pPr algn="ctr"/>
-            <a:endParaRPr lang="en-CA" sz="2800" b="1" dirty="0"/>
-          </a:p>
-          <a:p>
-            <a:pPr marL="285750" indent="-285750">
-              <a:buFont typeface="Arial" panose="020B0604020202020204" pitchFamily="34" charset="0"/>
-              <a:buChar char="•"/>
-            </a:pPr>
-            <a:r>
-              <a:rPr lang="en-CA" sz="2800" dirty="0"/>
-              <a:t>Random Forest has higher accuracy than Decision Trees between 0.96-3.7%.</a:t>
-            </a:r>
-          </a:p>
-          <a:p>
-            <a:pPr marL="285750" indent="-285750">
-              <a:buFont typeface="Arial" panose="020B0604020202020204" pitchFamily="34" charset="0"/>
-              <a:buChar char="•"/>
-            </a:pPr>
-            <a:r>
-              <a:rPr lang="en-CA" sz="2800" dirty="0"/>
-              <a:t>Improved accuracy likely due to reduced outlier sensitivity.</a:t>
-            </a:r>
-          </a:p>
-          <a:p>
-            <a:pPr marL="285750" indent="-285750">
-              <a:buFont typeface="Arial" panose="020B0604020202020204" pitchFamily="34" charset="0"/>
-              <a:buChar char="•"/>
-            </a:pPr>
-            <a:endParaRPr lang="en-CA" sz="2800" dirty="0"/>
-          </a:p>
-          <a:p>
-            <a:pPr marL="285750" indent="-285750">
-              <a:buFont typeface="Arial" panose="020B0604020202020204" pitchFamily="34" charset="0"/>
-              <a:buChar char="•"/>
-            </a:pPr>
-            <a:endParaRPr lang="en-CA" sz="2800" dirty="0"/>
-          </a:p>
-        </p:txBody>
-      </p:sp>
-      <p:sp>
-        <p:nvSpPr>
-          <p:cNvPr id="3" name="Slide Number Placeholder 2">
-            <a:extLst>
-              <a:ext uri="{FF2B5EF4-FFF2-40B4-BE49-F238E27FC236}">
-                <a16:creationId xmlns:a16="http://schemas.microsoft.com/office/drawing/2014/main" id="{3ACA72C5-DFB9-DCF6-E0FC-A17C37152318}"/>
-              </a:ext>
-            </a:extLst>
-          </p:cNvPr>
-          <p:cNvSpPr>
-            <a:spLocks noGrp="1"/>
-          </p:cNvSpPr>
-          <p:nvPr>
-            <p:ph type="sldNum" sz="quarter" idx="12"/>
-          </p:nvPr>
-        </p:nvSpPr>
-        <p:spPr/>
-        <p:txBody>
-          <a:bodyPr/>
-          <a:lstStyle/>
-          <a:p>
-            <a:fld id="{783C90D1-AD4B-442F-A893-0023CEF97D6F}" type="slidenum">
-              <a:rPr lang="en-CA" smtClean="0"/>
-              <a:t>10</a:t>
-            </a:fld>
-            <a:endParaRPr lang="en-CA"/>
-          </a:p>
-        </p:txBody>
-      </p:sp>
-      <p:cxnSp>
-        <p:nvCxnSpPr>
-          <p:cNvPr id="5" name="Straight Arrow Connector 4">
-            <a:extLst>
-              <a:ext uri="{FF2B5EF4-FFF2-40B4-BE49-F238E27FC236}">
-                <a16:creationId xmlns:a16="http://schemas.microsoft.com/office/drawing/2014/main" id="{65CDF026-E2C8-DE34-9CD5-116D3716BACE}"/>
-              </a:ext>
-            </a:extLst>
-          </p:cNvPr>
-          <p:cNvCxnSpPr/>
-          <p:nvPr/>
-        </p:nvCxnSpPr>
-        <p:spPr>
-          <a:xfrm>
-            <a:off x="1744910" y="3112316"/>
-            <a:ext cx="0" cy="2929046"/>
-          </a:xfrm>
-          <a:prstGeom prst="straightConnector1">
-            <a:avLst/>
-          </a:prstGeom>
-          <a:ln w="38100">
-            <a:solidFill>
-              <a:schemeClr val="tx1"/>
-            </a:solidFill>
-            <a:headEnd type="triangle"/>
-            <a:tailEnd type="triangle"/>
-          </a:ln>
-        </p:spPr>
-        <p:style>
-          <a:lnRef idx="1">
-            <a:schemeClr val="accent1"/>
-          </a:lnRef>
-          <a:fillRef idx="0">
-            <a:schemeClr val="accent1"/>
-          </a:fillRef>
-          <a:effectRef idx="0">
-            <a:schemeClr val="accent1"/>
-          </a:effectRef>
-          <a:fontRef idx="minor">
-            <a:schemeClr val="tx1"/>
-          </a:fontRef>
-        </p:style>
-      </p:cxnSp>
-      <p:sp>
-        <p:nvSpPr>
-          <p:cNvPr id="6" name="TextBox 5">
-            <a:extLst>
-              <a:ext uri="{FF2B5EF4-FFF2-40B4-BE49-F238E27FC236}">
-                <a16:creationId xmlns:a16="http://schemas.microsoft.com/office/drawing/2014/main" id="{424D7DEE-428E-0930-A467-B20038F5E820}"/>
-              </a:ext>
-            </a:extLst>
-          </p:cNvPr>
-          <p:cNvSpPr txBox="1"/>
-          <p:nvPr/>
-        </p:nvSpPr>
-        <p:spPr>
-          <a:xfrm>
-            <a:off x="1073791" y="4068661"/>
-            <a:ext cx="671119" cy="369332"/>
-          </a:xfrm>
-          <a:prstGeom prst="rect">
-            <a:avLst/>
-          </a:prstGeom>
-          <a:noFill/>
-        </p:spPr>
-        <p:txBody>
-          <a:bodyPr wrap="square" rtlCol="0">
-            <a:spAutoFit/>
-          </a:bodyPr>
-          <a:lstStyle/>
-          <a:p>
-            <a:r>
-              <a:rPr lang="en-CA" dirty="0"/>
-              <a:t>3.7%</a:t>
-            </a:r>
-          </a:p>
-        </p:txBody>
-      </p:sp>
-      <p:cxnSp>
-        <p:nvCxnSpPr>
-          <p:cNvPr id="7" name="Straight Arrow Connector 6">
-            <a:extLst>
-              <a:ext uri="{FF2B5EF4-FFF2-40B4-BE49-F238E27FC236}">
-                <a16:creationId xmlns:a16="http://schemas.microsoft.com/office/drawing/2014/main" id="{F85FBEFF-B50B-0806-419C-AD3B907A7961}"/>
-              </a:ext>
-            </a:extLst>
-          </p:cNvPr>
-          <p:cNvCxnSpPr>
-            <a:cxnSpLocks/>
-          </p:cNvCxnSpPr>
-          <p:nvPr/>
-        </p:nvCxnSpPr>
-        <p:spPr>
-          <a:xfrm>
-            <a:off x="3071769" y="3290526"/>
-            <a:ext cx="0" cy="828894"/>
-          </a:xfrm>
-          <a:prstGeom prst="straightConnector1">
-            <a:avLst/>
-          </a:prstGeom>
-          <a:ln w="38100">
-            <a:solidFill>
-              <a:schemeClr val="tx1"/>
-            </a:solidFill>
-            <a:headEnd type="triangle"/>
-            <a:tailEnd type="triangle"/>
-          </a:ln>
-        </p:spPr>
-        <p:style>
-          <a:lnRef idx="1">
-            <a:schemeClr val="accent1"/>
-          </a:lnRef>
-          <a:fillRef idx="0">
-            <a:schemeClr val="accent1"/>
-          </a:fillRef>
-          <a:effectRef idx="0">
-            <a:schemeClr val="accent1"/>
-          </a:effectRef>
-          <a:fontRef idx="minor">
-            <a:schemeClr val="tx1"/>
-          </a:fontRef>
-        </p:style>
-      </p:cxnSp>
-      <p:cxnSp>
-        <p:nvCxnSpPr>
-          <p:cNvPr id="9" name="Straight Arrow Connector 8">
-            <a:extLst>
-              <a:ext uri="{FF2B5EF4-FFF2-40B4-BE49-F238E27FC236}">
-                <a16:creationId xmlns:a16="http://schemas.microsoft.com/office/drawing/2014/main" id="{72457947-3E70-76E2-FF48-75B47A3F7989}"/>
-              </a:ext>
-            </a:extLst>
-          </p:cNvPr>
-          <p:cNvCxnSpPr>
-            <a:cxnSpLocks/>
-          </p:cNvCxnSpPr>
-          <p:nvPr/>
-        </p:nvCxnSpPr>
-        <p:spPr>
-          <a:xfrm>
-            <a:off x="4414007" y="3197713"/>
-            <a:ext cx="0" cy="1862528"/>
-          </a:xfrm>
-          <a:prstGeom prst="straightConnector1">
-            <a:avLst/>
-          </a:prstGeom>
-          <a:ln w="38100">
-            <a:solidFill>
-              <a:schemeClr val="tx1"/>
-            </a:solidFill>
-            <a:headEnd type="triangle"/>
-            <a:tailEnd type="triangle"/>
-          </a:ln>
-        </p:spPr>
-        <p:style>
-          <a:lnRef idx="1">
-            <a:schemeClr val="accent1"/>
-          </a:lnRef>
-          <a:fillRef idx="0">
-            <a:schemeClr val="accent1"/>
-          </a:fillRef>
-          <a:effectRef idx="0">
-            <a:schemeClr val="accent1"/>
-          </a:effectRef>
-          <a:fontRef idx="minor">
-            <a:schemeClr val="tx1"/>
-          </a:fontRef>
-        </p:style>
-      </p:cxnSp>
-      <p:sp>
-        <p:nvSpPr>
-          <p:cNvPr id="11" name="TextBox 10">
-            <a:extLst>
-              <a:ext uri="{FF2B5EF4-FFF2-40B4-BE49-F238E27FC236}">
-                <a16:creationId xmlns:a16="http://schemas.microsoft.com/office/drawing/2014/main" id="{B39E8B56-DD6E-3DA8-DFA7-5F4E180FECF4}"/>
-              </a:ext>
-            </a:extLst>
-          </p:cNvPr>
-          <p:cNvSpPr txBox="1"/>
-          <p:nvPr/>
-        </p:nvSpPr>
-        <p:spPr>
-          <a:xfrm>
-            <a:off x="2331346" y="3437615"/>
-            <a:ext cx="839539" cy="369332"/>
-          </a:xfrm>
-          <a:prstGeom prst="rect">
-            <a:avLst/>
-          </a:prstGeom>
-          <a:noFill/>
-        </p:spPr>
-        <p:txBody>
-          <a:bodyPr wrap="square" rtlCol="0">
-            <a:spAutoFit/>
-          </a:bodyPr>
-          <a:lstStyle/>
-          <a:p>
-            <a:r>
-              <a:rPr lang="en-CA" dirty="0"/>
-              <a:t>0.96%</a:t>
-            </a:r>
-          </a:p>
-        </p:txBody>
-      </p:sp>
-      <p:sp>
-        <p:nvSpPr>
-          <p:cNvPr id="12" name="TextBox 11">
-            <a:extLst>
-              <a:ext uri="{FF2B5EF4-FFF2-40B4-BE49-F238E27FC236}">
-                <a16:creationId xmlns:a16="http://schemas.microsoft.com/office/drawing/2014/main" id="{D7C278DE-CCAD-11C4-6AF9-04132D4E4ADC}"/>
-              </a:ext>
-            </a:extLst>
-          </p:cNvPr>
-          <p:cNvSpPr txBox="1"/>
-          <p:nvPr/>
-        </p:nvSpPr>
-        <p:spPr>
-          <a:xfrm>
-            <a:off x="3726281" y="4051883"/>
-            <a:ext cx="839539" cy="369332"/>
-          </a:xfrm>
-          <a:prstGeom prst="rect">
-            <a:avLst/>
-          </a:prstGeom>
-          <a:noFill/>
-        </p:spPr>
-        <p:txBody>
-          <a:bodyPr wrap="square" rtlCol="0">
-            <a:spAutoFit/>
-          </a:bodyPr>
-          <a:lstStyle/>
-          <a:p>
-            <a:r>
-              <a:rPr lang="en-CA" dirty="0"/>
-              <a:t>2.3%</a:t>
-            </a:r>
-          </a:p>
-        </p:txBody>
-      </p:sp>
-    </p:spTree>
-    <p:extLst>
-      <p:ext uri="{BB962C8B-B14F-4D97-AF65-F5344CB8AC3E}">
-        <p14:creationId xmlns:p14="http://schemas.microsoft.com/office/powerpoint/2010/main" val="3122938482"/>
-      </p:ext>
-    </p:extLst>
-  </p:cSld>
-  <p:clrMapOvr>
-    <a:masterClrMapping/>
-  </p:clrMapOvr>
-</p:sld>
-</file>
-
-<file path=ppt/slides/slide11.xml><?xml version="1.0" encoding="utf-8"?>
-<p:sld xmlns:a="http://schemas.openxmlformats.org/drawingml/2006/main" xmlns:r="http://schemas.openxmlformats.org/officeDocument/2006/relationships" xmlns:p="http://schemas.openxmlformats.org/presentationml/2006/main">
-  <p:cSld>
-    <p:spTree>
-      <p:nvGrpSpPr>
-        <p:cNvPr id="1" name=""/>
-        <p:cNvGrpSpPr/>
-        <p:nvPr/>
-      </p:nvGrpSpPr>
-      <p:grpSpPr>
-        <a:xfrm>
-          <a:off x="0" y="0"/>
-          <a:ext cx="0" cy="0"/>
-          <a:chOff x="0" y="0"/>
-          <a:chExt cx="0" cy="0"/>
-        </a:xfrm>
-      </p:grpSpPr>
-      <p:sp>
-        <p:nvSpPr>
-          <p:cNvPr id="3" name="Slide Number Placeholder 2">
-            <a:extLst>
-              <a:ext uri="{FF2B5EF4-FFF2-40B4-BE49-F238E27FC236}">
-                <a16:creationId xmlns:a16="http://schemas.microsoft.com/office/drawing/2014/main" id="{7DC75D85-F352-38EB-5CAE-03D7064D8E6F}"/>
-              </a:ext>
-            </a:extLst>
-          </p:cNvPr>
-          <p:cNvSpPr>
-            <a:spLocks noGrp="1"/>
-          </p:cNvSpPr>
-          <p:nvPr>
-            <p:ph type="sldNum" sz="quarter" idx="12"/>
-          </p:nvPr>
-        </p:nvSpPr>
-        <p:spPr/>
-        <p:txBody>
-          <a:bodyPr/>
-          <a:lstStyle/>
-          <a:p>
-            <a:fld id="{783C90D1-AD4B-442F-A893-0023CEF97D6F}" type="slidenum">
-              <a:rPr lang="en-CA" smtClean="0"/>
-              <a:t>11</a:t>
-            </a:fld>
-            <a:endParaRPr lang="en-CA"/>
-          </a:p>
-        </p:txBody>
-      </p:sp>
-      <p:sp>
-        <p:nvSpPr>
-          <p:cNvPr id="10" name="Title 1">
-            <a:extLst>
-              <a:ext uri="{FF2B5EF4-FFF2-40B4-BE49-F238E27FC236}">
-                <a16:creationId xmlns:a16="http://schemas.microsoft.com/office/drawing/2014/main" id="{3905FE1E-A8D3-7A58-C7AD-C340A041EC9C}"/>
-              </a:ext>
-            </a:extLst>
-          </p:cNvPr>
-          <p:cNvSpPr txBox="1">
-            <a:spLocks/>
-          </p:cNvSpPr>
-          <p:nvPr/>
-        </p:nvSpPr>
-        <p:spPr>
-          <a:xfrm>
-            <a:off x="186486" y="0"/>
-            <a:ext cx="7357336" cy="1516185"/>
-          </a:xfrm>
-          <a:prstGeom prst="rect">
-            <a:avLst/>
-          </a:prstGeom>
-        </p:spPr>
-        <p:txBody>
-          <a:bodyPr vert="horz" lIns="91440" tIns="45720" rIns="91440" bIns="45720" rtlCol="0" anchor="b">
-            <a:normAutofit/>
-          </a:bodyPr>
-          <a:lstStyle>
-            <a:lvl1pPr algn="l" defTabSz="457200" rtl="0" eaLnBrk="1" latinLnBrk="0" hangingPunct="1">
-              <a:spcBef>
-                <a:spcPct val="0"/>
-              </a:spcBef>
-              <a:buNone/>
-              <a:defRPr sz="3600" kern="1200">
-                <a:solidFill>
-                  <a:schemeClr val="accent1"/>
-                </a:solidFill>
-                <a:latin typeface="+mj-lt"/>
-                <a:ea typeface="+mj-ea"/>
-                <a:cs typeface="+mj-cs"/>
-              </a:defRPr>
-            </a:lvl1pPr>
-            <a:lvl2pPr eaLnBrk="1" hangingPunct="1">
-              <a:defRPr>
-                <a:solidFill>
-                  <a:schemeClr val="tx2"/>
-                </a:solidFill>
-              </a:defRPr>
-            </a:lvl2pPr>
-            <a:lvl3pPr eaLnBrk="1" hangingPunct="1">
-              <a:defRPr>
-                <a:solidFill>
-                  <a:schemeClr val="tx2"/>
-                </a:solidFill>
-              </a:defRPr>
-            </a:lvl3pPr>
-            <a:lvl4pPr eaLnBrk="1" hangingPunct="1">
-              <a:defRPr>
-                <a:solidFill>
-                  <a:schemeClr val="tx2"/>
-                </a:solidFill>
-              </a:defRPr>
-            </a:lvl4pPr>
-            <a:lvl5pPr eaLnBrk="1" hangingPunct="1">
-              <a:defRPr>
-                <a:solidFill>
-                  <a:schemeClr val="tx2"/>
-                </a:solidFill>
-              </a:defRPr>
-            </a:lvl5pPr>
-            <a:lvl6pPr eaLnBrk="1" hangingPunct="1">
-              <a:defRPr>
-                <a:solidFill>
-                  <a:schemeClr val="tx2"/>
-                </a:solidFill>
-              </a:defRPr>
-            </a:lvl6pPr>
-            <a:lvl7pPr eaLnBrk="1" hangingPunct="1">
-              <a:defRPr>
-                <a:solidFill>
-                  <a:schemeClr val="tx2"/>
-                </a:solidFill>
-              </a:defRPr>
-            </a:lvl7pPr>
-            <a:lvl8pPr eaLnBrk="1" hangingPunct="1">
-              <a:defRPr>
-                <a:solidFill>
-                  <a:schemeClr val="tx2"/>
-                </a:solidFill>
-              </a:defRPr>
-            </a:lvl8pPr>
-            <a:lvl9pPr eaLnBrk="1" hangingPunct="1">
-              <a:defRPr>
-                <a:solidFill>
-                  <a:schemeClr val="tx2"/>
-                </a:solidFill>
-              </a:defRPr>
-            </a:lvl9pPr>
-          </a:lstStyle>
-          <a:p>
-            <a:r>
-              <a:rPr lang="en-US" sz="4800" dirty="0">
-                <a:solidFill>
-                  <a:schemeClr val="tx1"/>
-                </a:solidFill>
-              </a:rPr>
-              <a:t>Summary</a:t>
-            </a:r>
-          </a:p>
-        </p:txBody>
-      </p:sp>
-    </p:spTree>
-    <p:extLst>
-      <p:ext uri="{BB962C8B-B14F-4D97-AF65-F5344CB8AC3E}">
-        <p14:creationId xmlns:p14="http://schemas.microsoft.com/office/powerpoint/2010/main" val="3713607901"/>
-      </p:ext>
-    </p:extLst>
-  </p:cSld>
-  <p:clrMapOvr>
-    <a:masterClrMapping/>
-  </p:clrMapOvr>
-</p:sld>
-</file>
-
-<file path=ppt/slides/slide2.xml><?xml version="1.0" encoding="utf-8"?>
-<p:sld xmlns:a="http://schemas.openxmlformats.org/drawingml/2006/main" xmlns:r="http://schemas.openxmlformats.org/officeDocument/2006/relationships" xmlns:p="http://schemas.openxmlformats.org/presentationml/2006/main">
-  <p:cSld>
-    <p:bg>
-      <p:bgPr>
-        <a:solidFill>
-          <a:schemeClr val="bg1"/>
-        </a:solidFill>
-        <a:effectLst/>
-      </p:bgPr>
-    </p:bg>
-    <p:spTree>
-      <p:nvGrpSpPr>
-        <p:cNvPr id="1" name=""/>
-        <p:cNvGrpSpPr/>
-        <p:nvPr/>
-      </p:nvGrpSpPr>
-      <p:grpSpPr>
-        <a:xfrm>
-          <a:off x="0" y="0"/>
-          <a:ext cx="0" cy="0"/>
-          <a:chOff x="0" y="0"/>
-          <a:chExt cx="0" cy="0"/>
-        </a:xfrm>
-      </p:grpSpPr>
-      <p:sp>
-        <p:nvSpPr>
-          <p:cNvPr id="2" name="Title 1">
-            <a:extLst>
-              <a:ext uri="{FF2B5EF4-FFF2-40B4-BE49-F238E27FC236}">
-                <a16:creationId xmlns:a16="http://schemas.microsoft.com/office/drawing/2014/main" id="{437B3693-1A79-34B5-944C-B789F8A7F8D5}"/>
-              </a:ext>
-            </a:extLst>
-          </p:cNvPr>
-          <p:cNvSpPr>
-            <a:spLocks noGrp="1"/>
-          </p:cNvSpPr>
-          <p:nvPr>
-            <p:ph type="title"/>
-          </p:nvPr>
-        </p:nvSpPr>
-        <p:spPr>
-          <a:xfrm>
-            <a:off x="186486" y="0"/>
-            <a:ext cx="7357336" cy="1516185"/>
-          </a:xfrm>
-        </p:spPr>
-        <p:txBody>
-          <a:bodyPr vert="horz" lIns="91440" tIns="45720" rIns="91440" bIns="45720" rtlCol="0" anchor="b">
-            <a:normAutofit/>
-          </a:bodyPr>
-          <a:lstStyle/>
-          <a:p>
-            <a:r>
-              <a:rPr lang="en-US" sz="4800" kern="1200" dirty="0">
-                <a:solidFill>
-                  <a:schemeClr val="tx1"/>
-                </a:solidFill>
-                <a:latin typeface="+mj-lt"/>
-                <a:ea typeface="+mj-ea"/>
-                <a:cs typeface="+mj-cs"/>
-              </a:rPr>
-              <a:t>Evaluating Models</a:t>
-            </a:r>
-          </a:p>
-        </p:txBody>
-      </p:sp>
-      <p:sp>
-        <p:nvSpPr>
-          <p:cNvPr id="22" name="Slide Number Placeholder 21">
-            <a:extLst>
-              <a:ext uri="{FF2B5EF4-FFF2-40B4-BE49-F238E27FC236}">
-                <a16:creationId xmlns:a16="http://schemas.microsoft.com/office/drawing/2014/main" id="{50E39E65-E39F-5C91-10B6-D5DD43AD0343}"/>
-              </a:ext>
-            </a:extLst>
-          </p:cNvPr>
-          <p:cNvSpPr>
-            <a:spLocks noGrp="1"/>
-          </p:cNvSpPr>
-          <p:nvPr>
-            <p:ph type="sldNum" sz="quarter" idx="12"/>
-          </p:nvPr>
-        </p:nvSpPr>
-        <p:spPr/>
-        <p:txBody>
-          <a:bodyPr/>
-          <a:lstStyle/>
-          <a:p>
-            <a:fld id="{783C90D1-AD4B-442F-A893-0023CEF97D6F}" type="slidenum">
-              <a:rPr lang="en-CA" smtClean="0"/>
-              <a:t>2</a:t>
-            </a:fld>
-            <a:endParaRPr lang="en-CA"/>
-          </a:p>
-        </p:txBody>
-      </p:sp>
-      <p:sp>
-        <p:nvSpPr>
-          <p:cNvPr id="3" name="TextBox 2">
-            <a:extLst>
-              <a:ext uri="{FF2B5EF4-FFF2-40B4-BE49-F238E27FC236}">
-                <a16:creationId xmlns:a16="http://schemas.microsoft.com/office/drawing/2014/main" id="{48409D96-D39D-CC13-8515-9C40081B605F}"/>
-              </a:ext>
-            </a:extLst>
-          </p:cNvPr>
-          <p:cNvSpPr txBox="1"/>
-          <p:nvPr/>
-        </p:nvSpPr>
-        <p:spPr>
-          <a:xfrm>
-            <a:off x="199698" y="1631576"/>
-            <a:ext cx="8390965" cy="2585323"/>
-          </a:xfrm>
-          <a:prstGeom prst="rect">
-            <a:avLst/>
-          </a:prstGeom>
-          <a:noFill/>
-        </p:spPr>
-        <p:txBody>
-          <a:bodyPr wrap="square" rtlCol="0">
-            <a:spAutoFit/>
-          </a:bodyPr>
-          <a:lstStyle/>
-          <a:p>
-            <a:r>
-              <a:rPr lang="en-CA" b="1" dirty="0"/>
-              <a:t>Approach: </a:t>
-            </a:r>
-            <a:r>
-              <a:rPr lang="en-CA" dirty="0"/>
-              <a:t>Analyze performance of each model separately and explore opportunities for optimizing their performance. </a:t>
-            </a:r>
-          </a:p>
-          <a:p>
-            <a:endParaRPr lang="en-CA" dirty="0"/>
-          </a:p>
-          <a:p>
-            <a:r>
-              <a:rPr lang="en-CA" b="1" dirty="0"/>
-              <a:t>Scoring Metrics:</a:t>
-            </a:r>
-          </a:p>
-          <a:p>
-            <a:endParaRPr lang="en-CA" b="1" dirty="0"/>
-          </a:p>
-          <a:p>
-            <a:pPr marL="742950" lvl="1" indent="-285750">
-              <a:buFont typeface="Arial" panose="020B0604020202020204" pitchFamily="34" charset="0"/>
-              <a:buChar char="•"/>
-            </a:pPr>
-            <a:r>
-              <a:rPr lang="en-CA" dirty="0"/>
-              <a:t>Training/Validation Accuracy</a:t>
-            </a:r>
-          </a:p>
-          <a:p>
-            <a:pPr marL="742950" lvl="1" indent="-285750">
-              <a:buFont typeface="Arial" panose="020B0604020202020204" pitchFamily="34" charset="0"/>
-              <a:buChar char="•"/>
-            </a:pPr>
-            <a:r>
-              <a:rPr lang="en-CA" dirty="0"/>
-              <a:t>Training/Validation Weighted Precision</a:t>
-            </a:r>
-          </a:p>
-          <a:p>
-            <a:pPr marL="742950" lvl="1" indent="-285750">
-              <a:buFont typeface="Arial" panose="020B0604020202020204" pitchFamily="34" charset="0"/>
-              <a:buChar char="•"/>
-            </a:pPr>
-            <a:endParaRPr lang="en-CA" dirty="0"/>
-          </a:p>
-          <a:p>
-            <a:pPr marL="742950" lvl="1" indent="-285750">
-              <a:buFont typeface="Arial" panose="020B0604020202020204" pitchFamily="34" charset="0"/>
-              <a:buChar char="•"/>
-            </a:pPr>
-            <a:endParaRPr lang="en-CA" dirty="0"/>
-          </a:p>
-        </p:txBody>
-      </p:sp>
-    </p:spTree>
-    <p:extLst>
-      <p:ext uri="{BB962C8B-B14F-4D97-AF65-F5344CB8AC3E}">
-        <p14:creationId xmlns:p14="http://schemas.microsoft.com/office/powerpoint/2010/main" val="2003425797"/>
-      </p:ext>
-    </p:extLst>
-  </p:cSld>
-  <p:clrMapOvr>
-    <a:masterClrMapping/>
-  </p:clrMapOvr>
-</p:sld>
-</file>
-
-<file path=ppt/slides/slide3.xml><?xml version="1.0" encoding="utf-8"?>
 <p:sld xmlns:a="http://schemas.openxmlformats.org/drawingml/2006/main" xmlns:r="http://schemas.openxmlformats.org/officeDocument/2006/relationships" xmlns:p="http://schemas.openxmlformats.org/presentationml/2006/main">
   <p:cSld>
     <p:bg>
@@ -7413,7 +6731,7 @@
           <a:p>
             <a:fld id="{783C90D1-AD4B-442F-A893-0023CEF97D6F}" type="slidenum">
               <a:rPr lang="en-CA" smtClean="0"/>
-              <a:t>3</a:t>
+              <a:t>10</a:t>
             </a:fld>
             <a:endParaRPr lang="en-CA"/>
           </a:p>
@@ -7612,7 +6930,7 @@
 </p:sld>
 </file>
 
-<file path=ppt/slides/slide4.xml><?xml version="1.0" encoding="utf-8"?>
+<file path=ppt/slides/slide11.xml><?xml version="1.0" encoding="utf-8"?>
 <p:sld xmlns:a="http://schemas.openxmlformats.org/drawingml/2006/main" xmlns:r="http://schemas.openxmlformats.org/officeDocument/2006/relationships" xmlns:p="http://schemas.openxmlformats.org/presentationml/2006/main">
   <p:cSld>
     <p:bg>
@@ -7773,7 +7091,7 @@
           <a:p>
             <a:fld id="{783C90D1-AD4B-442F-A893-0023CEF97D6F}" type="slidenum">
               <a:rPr lang="en-CA" smtClean="0"/>
-              <a:t>4</a:t>
+              <a:t>11</a:t>
             </a:fld>
             <a:endParaRPr lang="en-CA"/>
           </a:p>
@@ -7839,7 +7157,7 @@
 </p:sld>
 </file>
 
-<file path=ppt/slides/slide5.xml><?xml version="1.0" encoding="utf-8"?>
+<file path=ppt/slides/slide12.xml><?xml version="1.0" encoding="utf-8"?>
 <p:sld xmlns:a="http://schemas.openxmlformats.org/drawingml/2006/main" xmlns:r="http://schemas.openxmlformats.org/officeDocument/2006/relationships" xmlns:p="http://schemas.openxmlformats.org/presentationml/2006/main">
   <p:cSld>
     <p:bg>
@@ -8000,7 +7318,7 @@
           <a:p>
             <a:fld id="{783C90D1-AD4B-442F-A893-0023CEF97D6F}" type="slidenum">
               <a:rPr lang="en-CA" smtClean="0"/>
-              <a:t>5</a:t>
+              <a:t>12</a:t>
             </a:fld>
             <a:endParaRPr lang="en-CA"/>
           </a:p>
@@ -8124,7 +7442,7 @@
 </p:sld>
 </file>
 
-<file path=ppt/slides/slide6.xml><?xml version="1.0" encoding="utf-8"?>
+<file path=ppt/slides/slide13.xml><?xml version="1.0" encoding="utf-8"?>
 <p:sld xmlns:a="http://schemas.openxmlformats.org/drawingml/2006/main" xmlns:r="http://schemas.openxmlformats.org/officeDocument/2006/relationships" xmlns:p="http://schemas.openxmlformats.org/presentationml/2006/main">
   <p:cSld>
     <p:bg>
@@ -8285,7 +7603,7 @@
           <a:p>
             <a:fld id="{783C90D1-AD4B-442F-A893-0023CEF97D6F}" type="slidenum">
               <a:rPr lang="en-CA" smtClean="0"/>
-              <a:t>6</a:t>
+              <a:t>13</a:t>
             </a:fld>
             <a:endParaRPr lang="en-CA"/>
           </a:p>
@@ -8423,7 +7741,7 @@
 </p:sld>
 </file>
 
-<file path=ppt/slides/slide7.xml><?xml version="1.0" encoding="utf-8"?>
+<file path=ppt/slides/slide14.xml><?xml version="1.0" encoding="utf-8"?>
 <p:sld xmlns:a="http://schemas.openxmlformats.org/drawingml/2006/main" xmlns:r="http://schemas.openxmlformats.org/officeDocument/2006/relationships" xmlns:p="http://schemas.openxmlformats.org/presentationml/2006/main">
   <p:cSld>
     <p:bg>
@@ -8584,7 +7902,7 @@
           <a:p>
             <a:fld id="{783C90D1-AD4B-442F-A893-0023CEF97D6F}" type="slidenum">
               <a:rPr lang="en-CA" smtClean="0"/>
-              <a:t>7</a:t>
+              <a:t>14</a:t>
             </a:fld>
             <a:endParaRPr lang="en-CA"/>
           </a:p>
@@ -8740,6 +8058,9 @@
                     <p:cTn id="3" fill="hold">
                       <p:stCondLst>
                         <p:cond delay="indefinite"/>
+                        <p:cond evt="onBegin" delay="0">
+                          <p:tn val="2"/>
+                        </p:cond>
                       </p:stCondLst>
                       <p:childTnLst>
                         <p:par>
@@ -8749,7 +8070,7 @@
                             </p:stCondLst>
                             <p:childTnLst>
                               <p:par>
-                                <p:cTn id="5" presetID="53" presetClass="entr" presetSubtype="16" fill="hold" nodeType="clickEffect">
+                                <p:cTn id="5" presetID="53" presetClass="entr" presetSubtype="16" fill="hold" nodeType="withEffect">
                                   <p:stCondLst>
                                     <p:cond delay="0"/>
                                   </p:stCondLst>
@@ -8860,7 +8181,7 @@
 </p:sld>
 </file>
 
-<file path=ppt/slides/slide8.xml><?xml version="1.0" encoding="utf-8"?>
+<file path=ppt/slides/slide15.xml><?xml version="1.0" encoding="utf-8"?>
 <p:sld xmlns:a="http://schemas.openxmlformats.org/drawingml/2006/main" xmlns:r="http://schemas.openxmlformats.org/officeDocument/2006/relationships" xmlns:p="http://schemas.openxmlformats.org/presentationml/2006/main">
   <p:cSld>
     <p:bg>
@@ -9108,7 +8429,7 @@
           <a:p>
             <a:fld id="{783C90D1-AD4B-442F-A893-0023CEF97D6F}" type="slidenum">
               <a:rPr lang="en-CA" smtClean="0"/>
-              <a:t>8</a:t>
+              <a:t>15</a:t>
             </a:fld>
             <a:endParaRPr lang="en-CA"/>
           </a:p>
@@ -9127,7 +8448,7 @@
 </p:sld>
 </file>
 
-<file path=ppt/slides/slide9.xml><?xml version="1.0" encoding="utf-8"?>
+<file path=ppt/slides/slide16.xml><?xml version="1.0" encoding="utf-8"?>
 <p:sld xmlns:a="http://schemas.openxmlformats.org/drawingml/2006/main" xmlns:r="http://schemas.openxmlformats.org/officeDocument/2006/relationships" xmlns:p="http://schemas.openxmlformats.org/presentationml/2006/main">
   <p:cSld>
     <p:bg>
@@ -9320,7 +8641,7 @@
             </a:pPr>
             <a:r>
               <a:rPr lang="en-CA" sz="2800" dirty="0"/>
-              <a:t>Therefore, relationships between features is likely </a:t>
+              <a:t>Relationships between entries is likely </a:t>
             </a:r>
             <a:r>
               <a:rPr lang="en-CA" sz="2800" i="1" dirty="0"/>
@@ -9352,7 +8673,7 @@
           <a:p>
             <a:fld id="{783C90D1-AD4B-442F-A893-0023CEF97D6F}" type="slidenum">
               <a:rPr lang="en-CA" smtClean="0"/>
-              <a:t>9</a:t>
+              <a:t>16</a:t>
             </a:fld>
             <a:endParaRPr lang="en-CA"/>
           </a:p>
@@ -9548,6 +8869,3781 @@
       <p:bldP spid="21" grpId="0" build="p"/>
     </p:bldLst>
   </p:timing>
+</p:sld>
+</file>
+
+<file path=ppt/slides/slide17.xml><?xml version="1.0" encoding="utf-8"?>
+<p:sld xmlns:a="http://schemas.openxmlformats.org/drawingml/2006/main" xmlns:r="http://schemas.openxmlformats.org/officeDocument/2006/relationships" xmlns:p="http://schemas.openxmlformats.org/presentationml/2006/main">
+  <p:cSld>
+    <p:bg>
+      <p:bgPr>
+        <a:solidFill>
+          <a:schemeClr val="bg1"/>
+        </a:solidFill>
+        <a:effectLst/>
+      </p:bgPr>
+    </p:bg>
+    <p:spTree>
+      <p:nvGrpSpPr>
+        <p:cNvPr id="1" name=""/>
+        <p:cNvGrpSpPr/>
+        <p:nvPr/>
+      </p:nvGrpSpPr>
+      <p:grpSpPr>
+        <a:xfrm>
+          <a:off x="0" y="0"/>
+          <a:ext cx="0" cy="0"/>
+          <a:chOff x="0" y="0"/>
+          <a:chExt cx="0" cy="0"/>
+        </a:xfrm>
+      </p:grpSpPr>
+      <p:sp>
+        <p:nvSpPr>
+          <p:cNvPr id="2" name="Title 1">
+            <a:extLst>
+              <a:ext uri="{FF2B5EF4-FFF2-40B4-BE49-F238E27FC236}">
+                <a16:creationId xmlns:a16="http://schemas.microsoft.com/office/drawing/2014/main" id="{437B3693-1A79-34B5-944C-B789F8A7F8D5}"/>
+              </a:ext>
+            </a:extLst>
+          </p:cNvPr>
+          <p:cNvSpPr>
+            <a:spLocks noGrp="1"/>
+          </p:cNvSpPr>
+          <p:nvPr>
+            <p:ph type="title"/>
+          </p:nvPr>
+        </p:nvSpPr>
+        <p:spPr>
+          <a:xfrm>
+            <a:off x="186486" y="0"/>
+            <a:ext cx="7357336" cy="1516185"/>
+          </a:xfrm>
+        </p:spPr>
+        <p:txBody>
+          <a:bodyPr vert="horz" lIns="91440" tIns="45720" rIns="91440" bIns="45720" rtlCol="0" anchor="b">
+            <a:normAutofit/>
+          </a:bodyPr>
+          <a:lstStyle/>
+          <a:p>
+            <a:r>
+              <a:rPr lang="en-US" sz="4800" kern="1200" dirty="0">
+                <a:solidFill>
+                  <a:schemeClr val="tx1"/>
+                </a:solidFill>
+                <a:latin typeface="+mj-lt"/>
+                <a:ea typeface="+mj-ea"/>
+                <a:cs typeface="+mj-cs"/>
+              </a:rPr>
+              <a:t>Evaluating Models</a:t>
+            </a:r>
+          </a:p>
+        </p:txBody>
+      </p:sp>
+      <p:pic>
+        <p:nvPicPr>
+          <p:cNvPr id="18" name="Picture 17" descr="A picture containing chart&#10;&#10;Description automatically generated">
+            <a:extLst>
+              <a:ext uri="{FF2B5EF4-FFF2-40B4-BE49-F238E27FC236}">
+                <a16:creationId xmlns:a16="http://schemas.microsoft.com/office/drawing/2014/main" id="{B3512374-9F7B-B2E8-0C5A-C35697E51136}"/>
+              </a:ext>
+            </a:extLst>
+          </p:cNvPr>
+          <p:cNvPicPr>
+            <a:picLocks noChangeAspect="1"/>
+          </p:cNvPicPr>
+          <p:nvPr/>
+        </p:nvPicPr>
+        <p:blipFill>
+          <a:blip r:embed="rId2">
+            <a:extLst>
+              <a:ext uri="{28A0092B-C50C-407E-A947-70E740481C1C}">
+                <a14:useLocalDpi xmlns:a14="http://schemas.microsoft.com/office/drawing/2010/main" val="0"/>
+              </a:ext>
+            </a:extLst>
+          </a:blip>
+          <a:stretch>
+            <a:fillRect/>
+          </a:stretch>
+        </p:blipFill>
+        <p:spPr>
+          <a:xfrm>
+            <a:off x="2784475" y="1880118"/>
+            <a:ext cx="2161359" cy="396357"/>
+          </a:xfrm>
+          <a:prstGeom prst="rect">
+            <a:avLst/>
+          </a:prstGeom>
+        </p:spPr>
+      </p:pic>
+      <p:pic>
+        <p:nvPicPr>
+          <p:cNvPr id="20" name="Picture 19">
+            <a:extLst>
+              <a:ext uri="{FF2B5EF4-FFF2-40B4-BE49-F238E27FC236}">
+                <a16:creationId xmlns:a16="http://schemas.microsoft.com/office/drawing/2014/main" id="{1DD35B9C-9E4D-5FB5-2DAD-ED946E6E3AE3}"/>
+              </a:ext>
+            </a:extLst>
+          </p:cNvPr>
+          <p:cNvPicPr>
+            <a:picLocks noChangeAspect="1"/>
+          </p:cNvPicPr>
+          <p:nvPr/>
+        </p:nvPicPr>
+        <p:blipFill>
+          <a:blip r:embed="rId3">
+            <a:extLst>
+              <a:ext uri="{28A0092B-C50C-407E-A947-70E740481C1C}">
+                <a14:useLocalDpi xmlns:a14="http://schemas.microsoft.com/office/drawing/2010/main" val="0"/>
+              </a:ext>
+            </a:extLst>
+          </a:blip>
+          <a:srcRect/>
+          <a:stretch/>
+        </p:blipFill>
+        <p:spPr>
+          <a:xfrm>
+            <a:off x="422350" y="1828790"/>
+            <a:ext cx="5029210" cy="5029210"/>
+          </a:xfrm>
+          <a:prstGeom prst="rect">
+            <a:avLst/>
+          </a:prstGeom>
+        </p:spPr>
+      </p:pic>
+      <p:sp>
+        <p:nvSpPr>
+          <p:cNvPr id="21" name="TextBox 20">
+            <a:extLst>
+              <a:ext uri="{FF2B5EF4-FFF2-40B4-BE49-F238E27FC236}">
+                <a16:creationId xmlns:a16="http://schemas.microsoft.com/office/drawing/2014/main" id="{3D3D6041-190D-6FD1-A24A-E329520E1D6A}"/>
+              </a:ext>
+            </a:extLst>
+          </p:cNvPr>
+          <p:cNvSpPr txBox="1"/>
+          <p:nvPr/>
+        </p:nvSpPr>
+        <p:spPr>
+          <a:xfrm>
+            <a:off x="5228593" y="1520811"/>
+            <a:ext cx="4447252" cy="4832092"/>
+          </a:xfrm>
+          <a:prstGeom prst="rect">
+            <a:avLst/>
+          </a:prstGeom>
+          <a:noFill/>
+        </p:spPr>
+        <p:txBody>
+          <a:bodyPr wrap="square" rtlCol="0">
+            <a:spAutoFit/>
+          </a:bodyPr>
+          <a:lstStyle/>
+          <a:p>
+            <a:pPr algn="ctr"/>
+            <a:r>
+              <a:rPr lang="en-CA" sz="2800" b="1" u="sng" dirty="0"/>
+              <a:t>General Findings</a:t>
+            </a:r>
+          </a:p>
+          <a:p>
+            <a:pPr algn="ctr"/>
+            <a:endParaRPr lang="en-CA" sz="2800" b="1" dirty="0"/>
+          </a:p>
+          <a:p>
+            <a:pPr marL="285750" indent="-285750">
+              <a:buFont typeface="Arial" panose="020B0604020202020204" pitchFamily="34" charset="0"/>
+              <a:buChar char="•"/>
+            </a:pPr>
+            <a:r>
+              <a:rPr lang="en-CA" sz="2800" dirty="0"/>
+              <a:t>Random Forest has higher accuracy than Decision Trees between 0.96-3.7%.</a:t>
+            </a:r>
+          </a:p>
+          <a:p>
+            <a:pPr marL="285750" indent="-285750">
+              <a:buFont typeface="Arial" panose="020B0604020202020204" pitchFamily="34" charset="0"/>
+              <a:buChar char="•"/>
+            </a:pPr>
+            <a:r>
+              <a:rPr lang="en-CA" sz="2800" dirty="0"/>
+              <a:t>Improved accuracy likely due to reduced outlier sensitivity.</a:t>
+            </a:r>
+          </a:p>
+          <a:p>
+            <a:pPr marL="285750" indent="-285750">
+              <a:buFont typeface="Arial" panose="020B0604020202020204" pitchFamily="34" charset="0"/>
+              <a:buChar char="•"/>
+            </a:pPr>
+            <a:endParaRPr lang="en-CA" sz="2800" dirty="0"/>
+          </a:p>
+          <a:p>
+            <a:pPr marL="285750" indent="-285750">
+              <a:buFont typeface="Arial" panose="020B0604020202020204" pitchFamily="34" charset="0"/>
+              <a:buChar char="•"/>
+            </a:pPr>
+            <a:endParaRPr lang="en-CA" sz="2800" dirty="0"/>
+          </a:p>
+        </p:txBody>
+      </p:sp>
+      <p:sp>
+        <p:nvSpPr>
+          <p:cNvPr id="3" name="Slide Number Placeholder 2">
+            <a:extLst>
+              <a:ext uri="{FF2B5EF4-FFF2-40B4-BE49-F238E27FC236}">
+                <a16:creationId xmlns:a16="http://schemas.microsoft.com/office/drawing/2014/main" id="{3ACA72C5-DFB9-DCF6-E0FC-A17C37152318}"/>
+              </a:ext>
+            </a:extLst>
+          </p:cNvPr>
+          <p:cNvSpPr>
+            <a:spLocks noGrp="1"/>
+          </p:cNvSpPr>
+          <p:nvPr>
+            <p:ph type="sldNum" sz="quarter" idx="12"/>
+          </p:nvPr>
+        </p:nvSpPr>
+        <p:spPr/>
+        <p:txBody>
+          <a:bodyPr/>
+          <a:lstStyle/>
+          <a:p>
+            <a:fld id="{783C90D1-AD4B-442F-A893-0023CEF97D6F}" type="slidenum">
+              <a:rPr lang="en-CA" smtClean="0"/>
+              <a:t>17</a:t>
+            </a:fld>
+            <a:endParaRPr lang="en-CA"/>
+          </a:p>
+        </p:txBody>
+      </p:sp>
+      <p:cxnSp>
+        <p:nvCxnSpPr>
+          <p:cNvPr id="5" name="Straight Arrow Connector 4">
+            <a:extLst>
+              <a:ext uri="{FF2B5EF4-FFF2-40B4-BE49-F238E27FC236}">
+                <a16:creationId xmlns:a16="http://schemas.microsoft.com/office/drawing/2014/main" id="{65CDF026-E2C8-DE34-9CD5-116D3716BACE}"/>
+              </a:ext>
+            </a:extLst>
+          </p:cNvPr>
+          <p:cNvCxnSpPr/>
+          <p:nvPr/>
+        </p:nvCxnSpPr>
+        <p:spPr>
+          <a:xfrm>
+            <a:off x="1744910" y="3112316"/>
+            <a:ext cx="0" cy="2929046"/>
+          </a:xfrm>
+          <a:prstGeom prst="straightConnector1">
+            <a:avLst/>
+          </a:prstGeom>
+          <a:ln w="38100">
+            <a:solidFill>
+              <a:schemeClr val="tx1"/>
+            </a:solidFill>
+            <a:headEnd type="triangle"/>
+            <a:tailEnd type="triangle"/>
+          </a:ln>
+        </p:spPr>
+        <p:style>
+          <a:lnRef idx="1">
+            <a:schemeClr val="accent1"/>
+          </a:lnRef>
+          <a:fillRef idx="0">
+            <a:schemeClr val="accent1"/>
+          </a:fillRef>
+          <a:effectRef idx="0">
+            <a:schemeClr val="accent1"/>
+          </a:effectRef>
+          <a:fontRef idx="minor">
+            <a:schemeClr val="tx1"/>
+          </a:fontRef>
+        </p:style>
+      </p:cxnSp>
+      <p:sp>
+        <p:nvSpPr>
+          <p:cNvPr id="6" name="TextBox 5">
+            <a:extLst>
+              <a:ext uri="{FF2B5EF4-FFF2-40B4-BE49-F238E27FC236}">
+                <a16:creationId xmlns:a16="http://schemas.microsoft.com/office/drawing/2014/main" id="{424D7DEE-428E-0930-A467-B20038F5E820}"/>
+              </a:ext>
+            </a:extLst>
+          </p:cNvPr>
+          <p:cNvSpPr txBox="1"/>
+          <p:nvPr/>
+        </p:nvSpPr>
+        <p:spPr>
+          <a:xfrm>
+            <a:off x="1073791" y="4068661"/>
+            <a:ext cx="671119" cy="369332"/>
+          </a:xfrm>
+          <a:prstGeom prst="rect">
+            <a:avLst/>
+          </a:prstGeom>
+          <a:noFill/>
+        </p:spPr>
+        <p:txBody>
+          <a:bodyPr wrap="square" rtlCol="0">
+            <a:spAutoFit/>
+          </a:bodyPr>
+          <a:lstStyle/>
+          <a:p>
+            <a:r>
+              <a:rPr lang="en-CA" dirty="0"/>
+              <a:t>3.7%</a:t>
+            </a:r>
+          </a:p>
+        </p:txBody>
+      </p:sp>
+      <p:cxnSp>
+        <p:nvCxnSpPr>
+          <p:cNvPr id="7" name="Straight Arrow Connector 6">
+            <a:extLst>
+              <a:ext uri="{FF2B5EF4-FFF2-40B4-BE49-F238E27FC236}">
+                <a16:creationId xmlns:a16="http://schemas.microsoft.com/office/drawing/2014/main" id="{F85FBEFF-B50B-0806-419C-AD3B907A7961}"/>
+              </a:ext>
+            </a:extLst>
+          </p:cNvPr>
+          <p:cNvCxnSpPr>
+            <a:cxnSpLocks/>
+          </p:cNvCxnSpPr>
+          <p:nvPr/>
+        </p:nvCxnSpPr>
+        <p:spPr>
+          <a:xfrm>
+            <a:off x="3071769" y="3290526"/>
+            <a:ext cx="0" cy="828894"/>
+          </a:xfrm>
+          <a:prstGeom prst="straightConnector1">
+            <a:avLst/>
+          </a:prstGeom>
+          <a:ln w="38100">
+            <a:solidFill>
+              <a:schemeClr val="tx1"/>
+            </a:solidFill>
+            <a:headEnd type="triangle"/>
+            <a:tailEnd type="triangle"/>
+          </a:ln>
+        </p:spPr>
+        <p:style>
+          <a:lnRef idx="1">
+            <a:schemeClr val="accent1"/>
+          </a:lnRef>
+          <a:fillRef idx="0">
+            <a:schemeClr val="accent1"/>
+          </a:fillRef>
+          <a:effectRef idx="0">
+            <a:schemeClr val="accent1"/>
+          </a:effectRef>
+          <a:fontRef idx="minor">
+            <a:schemeClr val="tx1"/>
+          </a:fontRef>
+        </p:style>
+      </p:cxnSp>
+      <p:cxnSp>
+        <p:nvCxnSpPr>
+          <p:cNvPr id="9" name="Straight Arrow Connector 8">
+            <a:extLst>
+              <a:ext uri="{FF2B5EF4-FFF2-40B4-BE49-F238E27FC236}">
+                <a16:creationId xmlns:a16="http://schemas.microsoft.com/office/drawing/2014/main" id="{72457947-3E70-76E2-FF48-75B47A3F7989}"/>
+              </a:ext>
+            </a:extLst>
+          </p:cNvPr>
+          <p:cNvCxnSpPr>
+            <a:cxnSpLocks/>
+          </p:cNvCxnSpPr>
+          <p:nvPr/>
+        </p:nvCxnSpPr>
+        <p:spPr>
+          <a:xfrm>
+            <a:off x="4414007" y="3197713"/>
+            <a:ext cx="0" cy="1862528"/>
+          </a:xfrm>
+          <a:prstGeom prst="straightConnector1">
+            <a:avLst/>
+          </a:prstGeom>
+          <a:ln w="38100">
+            <a:solidFill>
+              <a:schemeClr val="tx1"/>
+            </a:solidFill>
+            <a:headEnd type="triangle"/>
+            <a:tailEnd type="triangle"/>
+          </a:ln>
+        </p:spPr>
+        <p:style>
+          <a:lnRef idx="1">
+            <a:schemeClr val="accent1"/>
+          </a:lnRef>
+          <a:fillRef idx="0">
+            <a:schemeClr val="accent1"/>
+          </a:fillRef>
+          <a:effectRef idx="0">
+            <a:schemeClr val="accent1"/>
+          </a:effectRef>
+          <a:fontRef idx="minor">
+            <a:schemeClr val="tx1"/>
+          </a:fontRef>
+        </p:style>
+      </p:cxnSp>
+      <p:sp>
+        <p:nvSpPr>
+          <p:cNvPr id="11" name="TextBox 10">
+            <a:extLst>
+              <a:ext uri="{FF2B5EF4-FFF2-40B4-BE49-F238E27FC236}">
+                <a16:creationId xmlns:a16="http://schemas.microsoft.com/office/drawing/2014/main" id="{B39E8B56-DD6E-3DA8-DFA7-5F4E180FECF4}"/>
+              </a:ext>
+            </a:extLst>
+          </p:cNvPr>
+          <p:cNvSpPr txBox="1"/>
+          <p:nvPr/>
+        </p:nvSpPr>
+        <p:spPr>
+          <a:xfrm>
+            <a:off x="2331346" y="3437615"/>
+            <a:ext cx="839539" cy="369332"/>
+          </a:xfrm>
+          <a:prstGeom prst="rect">
+            <a:avLst/>
+          </a:prstGeom>
+          <a:noFill/>
+        </p:spPr>
+        <p:txBody>
+          <a:bodyPr wrap="square" rtlCol="0">
+            <a:spAutoFit/>
+          </a:bodyPr>
+          <a:lstStyle/>
+          <a:p>
+            <a:r>
+              <a:rPr lang="en-CA" dirty="0"/>
+              <a:t>0.96%</a:t>
+            </a:r>
+          </a:p>
+        </p:txBody>
+      </p:sp>
+      <p:sp>
+        <p:nvSpPr>
+          <p:cNvPr id="12" name="TextBox 11">
+            <a:extLst>
+              <a:ext uri="{FF2B5EF4-FFF2-40B4-BE49-F238E27FC236}">
+                <a16:creationId xmlns:a16="http://schemas.microsoft.com/office/drawing/2014/main" id="{D7C278DE-CCAD-11C4-6AF9-04132D4E4ADC}"/>
+              </a:ext>
+            </a:extLst>
+          </p:cNvPr>
+          <p:cNvSpPr txBox="1"/>
+          <p:nvPr/>
+        </p:nvSpPr>
+        <p:spPr>
+          <a:xfrm>
+            <a:off x="3726281" y="4051883"/>
+            <a:ext cx="839539" cy="369332"/>
+          </a:xfrm>
+          <a:prstGeom prst="rect">
+            <a:avLst/>
+          </a:prstGeom>
+          <a:noFill/>
+        </p:spPr>
+        <p:txBody>
+          <a:bodyPr wrap="square" rtlCol="0">
+            <a:spAutoFit/>
+          </a:bodyPr>
+          <a:lstStyle/>
+          <a:p>
+            <a:r>
+              <a:rPr lang="en-CA" dirty="0"/>
+              <a:t>2.3%</a:t>
+            </a:r>
+          </a:p>
+        </p:txBody>
+      </p:sp>
+    </p:spTree>
+    <p:extLst>
+      <p:ext uri="{BB962C8B-B14F-4D97-AF65-F5344CB8AC3E}">
+        <p14:creationId xmlns:p14="http://schemas.microsoft.com/office/powerpoint/2010/main" val="3122938482"/>
+      </p:ext>
+    </p:extLst>
+  </p:cSld>
+  <p:clrMapOvr>
+    <a:masterClrMapping/>
+  </p:clrMapOvr>
+</p:sld>
+</file>
+
+<file path=ppt/slides/slide18.xml><?xml version="1.0" encoding="utf-8"?>
+<p:sld xmlns:a="http://schemas.openxmlformats.org/drawingml/2006/main" xmlns:r="http://schemas.openxmlformats.org/officeDocument/2006/relationships" xmlns:p="http://schemas.openxmlformats.org/presentationml/2006/main">
+  <p:cSld>
+    <p:spTree>
+      <p:nvGrpSpPr>
+        <p:cNvPr id="1" name=""/>
+        <p:cNvGrpSpPr/>
+        <p:nvPr/>
+      </p:nvGrpSpPr>
+      <p:grpSpPr>
+        <a:xfrm>
+          <a:off x="0" y="0"/>
+          <a:ext cx="0" cy="0"/>
+          <a:chOff x="0" y="0"/>
+          <a:chExt cx="0" cy="0"/>
+        </a:xfrm>
+      </p:grpSpPr>
+      <p:sp>
+        <p:nvSpPr>
+          <p:cNvPr id="3" name="Slide Number Placeholder 2">
+            <a:extLst>
+              <a:ext uri="{FF2B5EF4-FFF2-40B4-BE49-F238E27FC236}">
+                <a16:creationId xmlns:a16="http://schemas.microsoft.com/office/drawing/2014/main" id="{7DC75D85-F352-38EB-5CAE-03D7064D8E6F}"/>
+              </a:ext>
+            </a:extLst>
+          </p:cNvPr>
+          <p:cNvSpPr>
+            <a:spLocks noGrp="1"/>
+          </p:cNvSpPr>
+          <p:nvPr>
+            <p:ph type="sldNum" sz="quarter" idx="12"/>
+          </p:nvPr>
+        </p:nvSpPr>
+        <p:spPr/>
+        <p:txBody>
+          <a:bodyPr/>
+          <a:lstStyle/>
+          <a:p>
+            <a:fld id="{783C90D1-AD4B-442F-A893-0023CEF97D6F}" type="slidenum">
+              <a:rPr lang="en-CA" smtClean="0"/>
+              <a:t>18</a:t>
+            </a:fld>
+            <a:endParaRPr lang="en-CA"/>
+          </a:p>
+        </p:txBody>
+      </p:sp>
+      <p:sp>
+        <p:nvSpPr>
+          <p:cNvPr id="10" name="Title 1">
+            <a:extLst>
+              <a:ext uri="{FF2B5EF4-FFF2-40B4-BE49-F238E27FC236}">
+                <a16:creationId xmlns:a16="http://schemas.microsoft.com/office/drawing/2014/main" id="{3905FE1E-A8D3-7A58-C7AD-C340A041EC9C}"/>
+              </a:ext>
+            </a:extLst>
+          </p:cNvPr>
+          <p:cNvSpPr txBox="1">
+            <a:spLocks/>
+          </p:cNvSpPr>
+          <p:nvPr/>
+        </p:nvSpPr>
+        <p:spPr>
+          <a:xfrm>
+            <a:off x="186486" y="0"/>
+            <a:ext cx="7357336" cy="1516185"/>
+          </a:xfrm>
+          <a:prstGeom prst="rect">
+            <a:avLst/>
+          </a:prstGeom>
+        </p:spPr>
+        <p:txBody>
+          <a:bodyPr vert="horz" lIns="91440" tIns="45720" rIns="91440" bIns="45720" rtlCol="0" anchor="b">
+            <a:normAutofit/>
+          </a:bodyPr>
+          <a:lstStyle>
+            <a:lvl1pPr algn="l" defTabSz="457200" rtl="0" eaLnBrk="1" latinLnBrk="0" hangingPunct="1">
+              <a:spcBef>
+                <a:spcPct val="0"/>
+              </a:spcBef>
+              <a:buNone/>
+              <a:defRPr sz="3600" kern="1200">
+                <a:solidFill>
+                  <a:schemeClr val="accent1"/>
+                </a:solidFill>
+                <a:latin typeface="+mj-lt"/>
+                <a:ea typeface="+mj-ea"/>
+                <a:cs typeface="+mj-cs"/>
+              </a:defRPr>
+            </a:lvl1pPr>
+            <a:lvl2pPr eaLnBrk="1" hangingPunct="1">
+              <a:defRPr>
+                <a:solidFill>
+                  <a:schemeClr val="tx2"/>
+                </a:solidFill>
+              </a:defRPr>
+            </a:lvl2pPr>
+            <a:lvl3pPr eaLnBrk="1" hangingPunct="1">
+              <a:defRPr>
+                <a:solidFill>
+                  <a:schemeClr val="tx2"/>
+                </a:solidFill>
+              </a:defRPr>
+            </a:lvl3pPr>
+            <a:lvl4pPr eaLnBrk="1" hangingPunct="1">
+              <a:defRPr>
+                <a:solidFill>
+                  <a:schemeClr val="tx2"/>
+                </a:solidFill>
+              </a:defRPr>
+            </a:lvl4pPr>
+            <a:lvl5pPr eaLnBrk="1" hangingPunct="1">
+              <a:defRPr>
+                <a:solidFill>
+                  <a:schemeClr val="tx2"/>
+                </a:solidFill>
+              </a:defRPr>
+            </a:lvl5pPr>
+            <a:lvl6pPr eaLnBrk="1" hangingPunct="1">
+              <a:defRPr>
+                <a:solidFill>
+                  <a:schemeClr val="tx2"/>
+                </a:solidFill>
+              </a:defRPr>
+            </a:lvl6pPr>
+            <a:lvl7pPr eaLnBrk="1" hangingPunct="1">
+              <a:defRPr>
+                <a:solidFill>
+                  <a:schemeClr val="tx2"/>
+                </a:solidFill>
+              </a:defRPr>
+            </a:lvl7pPr>
+            <a:lvl8pPr eaLnBrk="1" hangingPunct="1">
+              <a:defRPr>
+                <a:solidFill>
+                  <a:schemeClr val="tx2"/>
+                </a:solidFill>
+              </a:defRPr>
+            </a:lvl8pPr>
+            <a:lvl9pPr eaLnBrk="1" hangingPunct="1">
+              <a:defRPr>
+                <a:solidFill>
+                  <a:schemeClr val="tx2"/>
+                </a:solidFill>
+              </a:defRPr>
+            </a:lvl9pPr>
+          </a:lstStyle>
+          <a:p>
+            <a:r>
+              <a:rPr lang="en-US" sz="4800" dirty="0">
+                <a:solidFill>
+                  <a:schemeClr val="tx1"/>
+                </a:solidFill>
+              </a:rPr>
+              <a:t>Summary</a:t>
+            </a:r>
+          </a:p>
+        </p:txBody>
+      </p:sp>
+    </p:spTree>
+    <p:extLst>
+      <p:ext uri="{BB962C8B-B14F-4D97-AF65-F5344CB8AC3E}">
+        <p14:creationId xmlns:p14="http://schemas.microsoft.com/office/powerpoint/2010/main" val="3713607901"/>
+      </p:ext>
+    </p:extLst>
+  </p:cSld>
+  <p:clrMapOvr>
+    <a:masterClrMapping/>
+  </p:clrMapOvr>
+</p:sld>
+</file>
+
+<file path=ppt/slides/slide2.xml><?xml version="1.0" encoding="utf-8"?>
+<p:sld xmlns:a="http://schemas.openxmlformats.org/drawingml/2006/main" xmlns:r="http://schemas.openxmlformats.org/officeDocument/2006/relationships" xmlns:p="http://schemas.openxmlformats.org/presentationml/2006/main">
+  <p:cSld>
+    <p:spTree>
+      <p:nvGrpSpPr>
+        <p:cNvPr id="1" name=""/>
+        <p:cNvGrpSpPr/>
+        <p:nvPr/>
+      </p:nvGrpSpPr>
+      <p:grpSpPr>
+        <a:xfrm>
+          <a:off x="0" y="0"/>
+          <a:ext cx="0" cy="0"/>
+          <a:chOff x="0" y="0"/>
+          <a:chExt cx="0" cy="0"/>
+        </a:xfrm>
+      </p:grpSpPr>
+      <p:sp>
+        <p:nvSpPr>
+          <p:cNvPr id="3" name="Content Placeholder 2">
+            <a:extLst>
+              <a:ext uri="{FF2B5EF4-FFF2-40B4-BE49-F238E27FC236}">
+                <a16:creationId xmlns:a16="http://schemas.microsoft.com/office/drawing/2014/main" id="{5801C97D-A84B-B0C3-FBEC-5F351F771798}"/>
+              </a:ext>
+            </a:extLst>
+          </p:cNvPr>
+          <p:cNvSpPr>
+            <a:spLocks noGrp="1"/>
+          </p:cNvSpPr>
+          <p:nvPr>
+            <p:ph idx="1"/>
+          </p:nvPr>
+        </p:nvSpPr>
+        <p:spPr/>
+        <p:txBody>
+          <a:bodyPr/>
+          <a:lstStyle/>
+          <a:p>
+            <a:endParaRPr lang="en-CA" dirty="0"/>
+          </a:p>
+        </p:txBody>
+      </p:sp>
+      <p:sp>
+        <p:nvSpPr>
+          <p:cNvPr id="4" name="Slide Number Placeholder 3">
+            <a:extLst>
+              <a:ext uri="{FF2B5EF4-FFF2-40B4-BE49-F238E27FC236}">
+                <a16:creationId xmlns:a16="http://schemas.microsoft.com/office/drawing/2014/main" id="{FF63FB2D-5559-FF8E-9399-67927914F00D}"/>
+              </a:ext>
+            </a:extLst>
+          </p:cNvPr>
+          <p:cNvSpPr>
+            <a:spLocks noGrp="1"/>
+          </p:cNvSpPr>
+          <p:nvPr>
+            <p:ph type="sldNum" sz="quarter" idx="12"/>
+          </p:nvPr>
+        </p:nvSpPr>
+        <p:spPr/>
+        <p:txBody>
+          <a:bodyPr/>
+          <a:lstStyle/>
+          <a:p>
+            <a:fld id="{783C90D1-AD4B-442F-A893-0023CEF97D6F}" type="slidenum">
+              <a:rPr lang="en-CA" smtClean="0"/>
+              <a:t>2</a:t>
+            </a:fld>
+            <a:endParaRPr lang="en-CA"/>
+          </a:p>
+        </p:txBody>
+      </p:sp>
+      <p:sp>
+        <p:nvSpPr>
+          <p:cNvPr id="9" name="Title 1">
+            <a:extLst>
+              <a:ext uri="{FF2B5EF4-FFF2-40B4-BE49-F238E27FC236}">
+                <a16:creationId xmlns:a16="http://schemas.microsoft.com/office/drawing/2014/main" id="{32602555-F6A5-58C8-B613-7B9AA9C7133A}"/>
+              </a:ext>
+            </a:extLst>
+          </p:cNvPr>
+          <p:cNvSpPr>
+            <a:spLocks noGrp="1"/>
+          </p:cNvSpPr>
+          <p:nvPr>
+            <p:ph type="title"/>
+          </p:nvPr>
+        </p:nvSpPr>
+        <p:spPr>
+          <a:xfrm>
+            <a:off x="213380" y="279279"/>
+            <a:ext cx="7357336" cy="1516185"/>
+          </a:xfrm>
+        </p:spPr>
+        <p:txBody>
+          <a:bodyPr vert="horz" lIns="91440" tIns="45720" rIns="91440" bIns="45720" rtlCol="0" anchor="b">
+            <a:normAutofit fontScale="90000"/>
+          </a:bodyPr>
+          <a:lstStyle/>
+          <a:p>
+            <a:r>
+              <a:rPr lang="en-US" sz="4800" dirty="0">
+                <a:solidFill>
+                  <a:schemeClr val="tx1"/>
+                </a:solidFill>
+              </a:rPr>
+              <a:t>Is publishing high all about who you know?</a:t>
+            </a:r>
+            <a:endParaRPr lang="en-US" sz="4800" kern="1200" dirty="0">
+              <a:solidFill>
+                <a:schemeClr val="tx1"/>
+              </a:solidFill>
+              <a:latin typeface="+mj-lt"/>
+              <a:ea typeface="+mj-ea"/>
+              <a:cs typeface="+mj-cs"/>
+            </a:endParaRPr>
+          </a:p>
+        </p:txBody>
+      </p:sp>
+    </p:spTree>
+    <p:extLst>
+      <p:ext uri="{BB962C8B-B14F-4D97-AF65-F5344CB8AC3E}">
+        <p14:creationId xmlns:p14="http://schemas.microsoft.com/office/powerpoint/2010/main" val="2028598662"/>
+      </p:ext>
+    </p:extLst>
+  </p:cSld>
+  <p:clrMapOvr>
+    <a:masterClrMapping/>
+  </p:clrMapOvr>
+</p:sld>
+</file>
+
+<file path=ppt/slides/slide3.xml><?xml version="1.0" encoding="utf-8"?>
+<p:sld xmlns:a="http://schemas.openxmlformats.org/drawingml/2006/main" xmlns:r="http://schemas.openxmlformats.org/officeDocument/2006/relationships" xmlns:p="http://schemas.openxmlformats.org/presentationml/2006/main">
+  <p:cSld>
+    <p:spTree>
+      <p:nvGrpSpPr>
+        <p:cNvPr id="1" name=""/>
+        <p:cNvGrpSpPr/>
+        <p:nvPr/>
+      </p:nvGrpSpPr>
+      <p:grpSpPr>
+        <a:xfrm>
+          <a:off x="0" y="0"/>
+          <a:ext cx="0" cy="0"/>
+          <a:chOff x="0" y="0"/>
+          <a:chExt cx="0" cy="0"/>
+        </a:xfrm>
+      </p:grpSpPr>
+      <p:sp>
+        <p:nvSpPr>
+          <p:cNvPr id="3" name="Content Placeholder 2">
+            <a:extLst>
+              <a:ext uri="{FF2B5EF4-FFF2-40B4-BE49-F238E27FC236}">
+                <a16:creationId xmlns:a16="http://schemas.microsoft.com/office/drawing/2014/main" id="{5801C97D-A84B-B0C3-FBEC-5F351F771798}"/>
+              </a:ext>
+            </a:extLst>
+          </p:cNvPr>
+          <p:cNvSpPr>
+            <a:spLocks noGrp="1"/>
+          </p:cNvSpPr>
+          <p:nvPr>
+            <p:ph idx="1"/>
+          </p:nvPr>
+        </p:nvSpPr>
+        <p:spPr/>
+        <p:txBody>
+          <a:bodyPr/>
+          <a:lstStyle/>
+          <a:p>
+            <a:endParaRPr lang="en-CA" dirty="0"/>
+          </a:p>
+        </p:txBody>
+      </p:sp>
+      <p:sp>
+        <p:nvSpPr>
+          <p:cNvPr id="4" name="Slide Number Placeholder 3">
+            <a:extLst>
+              <a:ext uri="{FF2B5EF4-FFF2-40B4-BE49-F238E27FC236}">
+                <a16:creationId xmlns:a16="http://schemas.microsoft.com/office/drawing/2014/main" id="{FF63FB2D-5559-FF8E-9399-67927914F00D}"/>
+              </a:ext>
+            </a:extLst>
+          </p:cNvPr>
+          <p:cNvSpPr>
+            <a:spLocks noGrp="1"/>
+          </p:cNvSpPr>
+          <p:nvPr>
+            <p:ph type="sldNum" sz="quarter" idx="12"/>
+          </p:nvPr>
+        </p:nvSpPr>
+        <p:spPr/>
+        <p:txBody>
+          <a:bodyPr/>
+          <a:lstStyle/>
+          <a:p>
+            <a:fld id="{783C90D1-AD4B-442F-A893-0023CEF97D6F}" type="slidenum">
+              <a:rPr lang="en-CA" smtClean="0"/>
+              <a:t>3</a:t>
+            </a:fld>
+            <a:endParaRPr lang="en-CA"/>
+          </a:p>
+        </p:txBody>
+      </p:sp>
+      <p:sp>
+        <p:nvSpPr>
+          <p:cNvPr id="9" name="Title 1">
+            <a:extLst>
+              <a:ext uri="{FF2B5EF4-FFF2-40B4-BE49-F238E27FC236}">
+                <a16:creationId xmlns:a16="http://schemas.microsoft.com/office/drawing/2014/main" id="{32602555-F6A5-58C8-B613-7B9AA9C7133A}"/>
+              </a:ext>
+            </a:extLst>
+          </p:cNvPr>
+          <p:cNvSpPr>
+            <a:spLocks noGrp="1"/>
+          </p:cNvSpPr>
+          <p:nvPr>
+            <p:ph type="title"/>
+          </p:nvPr>
+        </p:nvSpPr>
+        <p:spPr>
+          <a:xfrm>
+            <a:off x="186486" y="0"/>
+            <a:ext cx="7357336" cy="1516185"/>
+          </a:xfrm>
+        </p:spPr>
+        <p:txBody>
+          <a:bodyPr vert="horz" lIns="91440" tIns="45720" rIns="91440" bIns="45720" rtlCol="0" anchor="b">
+            <a:normAutofit/>
+          </a:bodyPr>
+          <a:lstStyle/>
+          <a:p>
+            <a:r>
+              <a:rPr lang="en-US" sz="4800" kern="1200" dirty="0">
+                <a:solidFill>
+                  <a:schemeClr val="tx1"/>
+                </a:solidFill>
+                <a:latin typeface="+mj-lt"/>
+                <a:ea typeface="+mj-ea"/>
+                <a:cs typeface="+mj-cs"/>
+              </a:rPr>
+              <a:t>Defining Target Variable</a:t>
+            </a:r>
+          </a:p>
+        </p:txBody>
+      </p:sp>
+    </p:spTree>
+    <p:extLst>
+      <p:ext uri="{BB962C8B-B14F-4D97-AF65-F5344CB8AC3E}">
+        <p14:creationId xmlns:p14="http://schemas.microsoft.com/office/powerpoint/2010/main" val="3147599872"/>
+      </p:ext>
+    </p:extLst>
+  </p:cSld>
+  <p:clrMapOvr>
+    <a:masterClrMapping/>
+  </p:clrMapOvr>
+</p:sld>
+</file>
+
+<file path=ppt/slides/slide4.xml><?xml version="1.0" encoding="utf-8"?>
+<p:sld xmlns:a="http://schemas.openxmlformats.org/drawingml/2006/main" xmlns:r="http://schemas.openxmlformats.org/officeDocument/2006/relationships" xmlns:p="http://schemas.openxmlformats.org/presentationml/2006/main">
+  <p:cSld>
+    <p:spTree>
+      <p:nvGrpSpPr>
+        <p:cNvPr id="1" name=""/>
+        <p:cNvGrpSpPr/>
+        <p:nvPr/>
+      </p:nvGrpSpPr>
+      <p:grpSpPr>
+        <a:xfrm>
+          <a:off x="0" y="0"/>
+          <a:ext cx="0" cy="0"/>
+          <a:chOff x="0" y="0"/>
+          <a:chExt cx="0" cy="0"/>
+        </a:xfrm>
+      </p:grpSpPr>
+      <p:sp>
+        <p:nvSpPr>
+          <p:cNvPr id="3" name="Content Placeholder 2">
+            <a:extLst>
+              <a:ext uri="{FF2B5EF4-FFF2-40B4-BE49-F238E27FC236}">
+                <a16:creationId xmlns:a16="http://schemas.microsoft.com/office/drawing/2014/main" id="{5801C97D-A84B-B0C3-FBEC-5F351F771798}"/>
+              </a:ext>
+            </a:extLst>
+          </p:cNvPr>
+          <p:cNvSpPr>
+            <a:spLocks noGrp="1"/>
+          </p:cNvSpPr>
+          <p:nvPr>
+            <p:ph idx="1"/>
+          </p:nvPr>
+        </p:nvSpPr>
+        <p:spPr/>
+        <p:txBody>
+          <a:bodyPr/>
+          <a:lstStyle/>
+          <a:p>
+            <a:endParaRPr lang="en-CA" dirty="0"/>
+          </a:p>
+        </p:txBody>
+      </p:sp>
+      <p:sp>
+        <p:nvSpPr>
+          <p:cNvPr id="4" name="Slide Number Placeholder 3">
+            <a:extLst>
+              <a:ext uri="{FF2B5EF4-FFF2-40B4-BE49-F238E27FC236}">
+                <a16:creationId xmlns:a16="http://schemas.microsoft.com/office/drawing/2014/main" id="{FF63FB2D-5559-FF8E-9399-67927914F00D}"/>
+              </a:ext>
+            </a:extLst>
+          </p:cNvPr>
+          <p:cNvSpPr>
+            <a:spLocks noGrp="1"/>
+          </p:cNvSpPr>
+          <p:nvPr>
+            <p:ph type="sldNum" sz="quarter" idx="12"/>
+          </p:nvPr>
+        </p:nvSpPr>
+        <p:spPr/>
+        <p:txBody>
+          <a:bodyPr/>
+          <a:lstStyle/>
+          <a:p>
+            <a:fld id="{783C90D1-AD4B-442F-A893-0023CEF97D6F}" type="slidenum">
+              <a:rPr lang="en-CA" smtClean="0"/>
+              <a:t>4</a:t>
+            </a:fld>
+            <a:endParaRPr lang="en-CA"/>
+          </a:p>
+        </p:txBody>
+      </p:sp>
+      <p:sp>
+        <p:nvSpPr>
+          <p:cNvPr id="9" name="Title 1">
+            <a:extLst>
+              <a:ext uri="{FF2B5EF4-FFF2-40B4-BE49-F238E27FC236}">
+                <a16:creationId xmlns:a16="http://schemas.microsoft.com/office/drawing/2014/main" id="{32602555-F6A5-58C8-B613-7B9AA9C7133A}"/>
+              </a:ext>
+            </a:extLst>
+          </p:cNvPr>
+          <p:cNvSpPr>
+            <a:spLocks noGrp="1"/>
+          </p:cNvSpPr>
+          <p:nvPr>
+            <p:ph type="title"/>
+          </p:nvPr>
+        </p:nvSpPr>
+        <p:spPr>
+          <a:xfrm>
+            <a:off x="186486" y="0"/>
+            <a:ext cx="7357336" cy="1516185"/>
+          </a:xfrm>
+        </p:spPr>
+        <p:txBody>
+          <a:bodyPr vert="horz" lIns="91440" tIns="45720" rIns="91440" bIns="45720" rtlCol="0" anchor="b">
+            <a:normAutofit/>
+          </a:bodyPr>
+          <a:lstStyle/>
+          <a:p>
+            <a:r>
+              <a:rPr lang="en-US" sz="4800" kern="1200" dirty="0">
+                <a:solidFill>
+                  <a:schemeClr val="tx1"/>
+                </a:solidFill>
+                <a:latin typeface="+mj-lt"/>
+                <a:ea typeface="+mj-ea"/>
+                <a:cs typeface="+mj-cs"/>
+              </a:rPr>
+              <a:t>Data Cleaning Overview</a:t>
+            </a:r>
+          </a:p>
+        </p:txBody>
+      </p:sp>
+    </p:spTree>
+    <p:extLst>
+      <p:ext uri="{BB962C8B-B14F-4D97-AF65-F5344CB8AC3E}">
+        <p14:creationId xmlns:p14="http://schemas.microsoft.com/office/powerpoint/2010/main" val="3290701090"/>
+      </p:ext>
+    </p:extLst>
+  </p:cSld>
+  <p:clrMapOvr>
+    <a:masterClrMapping/>
+  </p:clrMapOvr>
+</p:sld>
+</file>
+
+<file path=ppt/slides/slide5.xml><?xml version="1.0" encoding="utf-8"?>
+<p:sld xmlns:a="http://schemas.openxmlformats.org/drawingml/2006/main" xmlns:r="http://schemas.openxmlformats.org/officeDocument/2006/relationships" xmlns:p="http://schemas.openxmlformats.org/presentationml/2006/main">
+  <p:cSld>
+    <p:spTree>
+      <p:nvGrpSpPr>
+        <p:cNvPr id="1" name=""/>
+        <p:cNvGrpSpPr/>
+        <p:nvPr/>
+      </p:nvGrpSpPr>
+      <p:grpSpPr>
+        <a:xfrm>
+          <a:off x="0" y="0"/>
+          <a:ext cx="0" cy="0"/>
+          <a:chOff x="0" y="0"/>
+          <a:chExt cx="0" cy="0"/>
+        </a:xfrm>
+      </p:grpSpPr>
+      <p:sp>
+        <p:nvSpPr>
+          <p:cNvPr id="3" name="Content Placeholder 2">
+            <a:extLst>
+              <a:ext uri="{FF2B5EF4-FFF2-40B4-BE49-F238E27FC236}">
+                <a16:creationId xmlns:a16="http://schemas.microsoft.com/office/drawing/2014/main" id="{21336F44-0E2B-08BE-B698-4861DE2ED2C3}"/>
+              </a:ext>
+            </a:extLst>
+          </p:cNvPr>
+          <p:cNvSpPr>
+            <a:spLocks noGrp="1"/>
+          </p:cNvSpPr>
+          <p:nvPr>
+            <p:ph idx="1"/>
+          </p:nvPr>
+        </p:nvSpPr>
+        <p:spPr>
+          <a:xfrm>
+            <a:off x="335664" y="1516186"/>
+            <a:ext cx="6457022" cy="816468"/>
+          </a:xfrm>
+        </p:spPr>
+        <p:txBody>
+          <a:bodyPr/>
+          <a:lstStyle/>
+          <a:p>
+            <a:r>
+              <a:rPr lang="en-CA" dirty="0"/>
+              <a:t>Sort observations into three tiers according to </a:t>
+            </a:r>
+            <a:r>
+              <a:rPr lang="en-CA" i="1" dirty="0"/>
+              <a:t>H index</a:t>
+            </a:r>
+          </a:p>
+          <a:p>
+            <a:r>
+              <a:rPr lang="en-CA" dirty="0"/>
+              <a:t>Higher Tier </a:t>
+            </a:r>
+            <a:r>
+              <a:rPr lang="en-CA" dirty="0">
+                <a:sym typeface="Wingdings" panose="05000000000000000000" pitchFamily="2" charset="2"/>
+              </a:rPr>
+              <a:t> Higher Publication Prestige</a:t>
+            </a:r>
+            <a:endParaRPr lang="en-CA" dirty="0"/>
+          </a:p>
+        </p:txBody>
+      </p:sp>
+      <p:sp>
+        <p:nvSpPr>
+          <p:cNvPr id="4" name="Slide Number Placeholder 3">
+            <a:extLst>
+              <a:ext uri="{FF2B5EF4-FFF2-40B4-BE49-F238E27FC236}">
+                <a16:creationId xmlns:a16="http://schemas.microsoft.com/office/drawing/2014/main" id="{7A702211-722C-C888-3843-2BB8F131482F}"/>
+              </a:ext>
+            </a:extLst>
+          </p:cNvPr>
+          <p:cNvSpPr>
+            <a:spLocks noGrp="1"/>
+          </p:cNvSpPr>
+          <p:nvPr>
+            <p:ph type="sldNum" sz="quarter" idx="12"/>
+          </p:nvPr>
+        </p:nvSpPr>
+        <p:spPr/>
+        <p:txBody>
+          <a:bodyPr/>
+          <a:lstStyle/>
+          <a:p>
+            <a:fld id="{783C90D1-AD4B-442F-A893-0023CEF97D6F}" type="slidenum">
+              <a:rPr lang="en-CA" smtClean="0"/>
+              <a:t>5</a:t>
+            </a:fld>
+            <a:endParaRPr lang="en-CA"/>
+          </a:p>
+        </p:txBody>
+      </p:sp>
+      <p:sp>
+        <p:nvSpPr>
+          <p:cNvPr id="5" name="Title 1">
+            <a:extLst>
+              <a:ext uri="{FF2B5EF4-FFF2-40B4-BE49-F238E27FC236}">
+                <a16:creationId xmlns:a16="http://schemas.microsoft.com/office/drawing/2014/main" id="{F9304593-A276-8C2A-E986-D9A14769B8F6}"/>
+              </a:ext>
+            </a:extLst>
+          </p:cNvPr>
+          <p:cNvSpPr>
+            <a:spLocks noGrp="1"/>
+          </p:cNvSpPr>
+          <p:nvPr>
+            <p:ph type="title"/>
+          </p:nvPr>
+        </p:nvSpPr>
+        <p:spPr>
+          <a:xfrm>
+            <a:off x="186486" y="0"/>
+            <a:ext cx="7357336" cy="1516185"/>
+          </a:xfrm>
+        </p:spPr>
+        <p:txBody>
+          <a:bodyPr vert="horz" lIns="91440" tIns="45720" rIns="91440" bIns="45720" rtlCol="0" anchor="b">
+            <a:normAutofit/>
+          </a:bodyPr>
+          <a:lstStyle/>
+          <a:p>
+            <a:r>
+              <a:rPr lang="en-US" sz="4800" kern="1200" dirty="0">
+                <a:solidFill>
+                  <a:schemeClr val="tx1"/>
+                </a:solidFill>
+                <a:latin typeface="+mj-lt"/>
+                <a:ea typeface="+mj-ea"/>
+                <a:cs typeface="+mj-cs"/>
+              </a:rPr>
+              <a:t>Defining Target Variable</a:t>
+            </a:r>
+          </a:p>
+        </p:txBody>
+      </p:sp>
+      <p:pic>
+        <p:nvPicPr>
+          <p:cNvPr id="11" name="Picture 10" descr="Icon&#10;&#10;Description automatically generated">
+            <a:extLst>
+              <a:ext uri="{FF2B5EF4-FFF2-40B4-BE49-F238E27FC236}">
+                <a16:creationId xmlns:a16="http://schemas.microsoft.com/office/drawing/2014/main" id="{BAE41C1C-C36D-4445-0E7D-F6674D5247C0}"/>
+              </a:ext>
+            </a:extLst>
+          </p:cNvPr>
+          <p:cNvPicPr>
+            <a:picLocks noChangeAspect="1"/>
+          </p:cNvPicPr>
+          <p:nvPr/>
+        </p:nvPicPr>
+        <p:blipFill>
+          <a:blip r:embed="rId2">
+            <a:extLst>
+              <a:ext uri="{28A0092B-C50C-407E-A947-70E740481C1C}">
+                <a14:useLocalDpi xmlns:a14="http://schemas.microsoft.com/office/drawing/2010/main" val="0"/>
+              </a:ext>
+            </a:extLst>
+          </a:blip>
+          <a:stretch>
+            <a:fillRect/>
+          </a:stretch>
+        </p:blipFill>
+        <p:spPr>
+          <a:xfrm>
+            <a:off x="384598" y="3020681"/>
+            <a:ext cx="5891349" cy="2677887"/>
+          </a:xfrm>
+          <a:prstGeom prst="rect">
+            <a:avLst/>
+          </a:prstGeom>
+        </p:spPr>
+      </p:pic>
+      <p:grpSp>
+        <p:nvGrpSpPr>
+          <p:cNvPr id="2" name="Group 1">
+            <a:extLst>
+              <a:ext uri="{FF2B5EF4-FFF2-40B4-BE49-F238E27FC236}">
+                <a16:creationId xmlns:a16="http://schemas.microsoft.com/office/drawing/2014/main" id="{88696B2F-B095-9D5B-C77E-2A076DBA4CFE}"/>
+              </a:ext>
+            </a:extLst>
+          </p:cNvPr>
+          <p:cNvGrpSpPr/>
+          <p:nvPr/>
+        </p:nvGrpSpPr>
+        <p:grpSpPr>
+          <a:xfrm>
+            <a:off x="6391470" y="3946537"/>
+            <a:ext cx="3306471" cy="826173"/>
+            <a:chOff x="5467739" y="3020681"/>
+            <a:chExt cx="3306471" cy="826173"/>
+          </a:xfrm>
+        </p:grpSpPr>
+        <p:sp>
+          <p:nvSpPr>
+            <p:cNvPr id="17" name="TextBox 16">
+              <a:extLst>
+                <a:ext uri="{FF2B5EF4-FFF2-40B4-BE49-F238E27FC236}">
+                  <a16:creationId xmlns:a16="http://schemas.microsoft.com/office/drawing/2014/main" id="{4CEEC701-A7DE-7790-BF70-64497ADE9EB1}"/>
+                </a:ext>
+              </a:extLst>
+            </p:cNvPr>
+            <p:cNvSpPr txBox="1"/>
+            <p:nvPr/>
+          </p:nvSpPr>
+          <p:spPr>
+            <a:xfrm>
+              <a:off x="5467739" y="3200523"/>
+              <a:ext cx="2606349" cy="646331"/>
+            </a:xfrm>
+            <a:prstGeom prst="rect">
+              <a:avLst/>
+            </a:prstGeom>
+            <a:noFill/>
+          </p:spPr>
+          <p:txBody>
+            <a:bodyPr wrap="square" rtlCol="0">
+              <a:spAutoFit/>
+            </a:bodyPr>
+            <a:lstStyle/>
+            <a:p>
+              <a:r>
+                <a:rPr lang="en-CA" b="1" dirty="0"/>
+                <a:t>Uniform distribution of observations</a:t>
+              </a:r>
+              <a:endParaRPr lang="en-CA" sz="2800" b="1" dirty="0"/>
+            </a:p>
+          </p:txBody>
+        </p:sp>
+        <p:pic>
+          <p:nvPicPr>
+            <p:cNvPr id="2050" name="Picture 2" descr="Free Check Mark Clip Art - Cliparts.co">
+              <a:extLst>
+                <a:ext uri="{FF2B5EF4-FFF2-40B4-BE49-F238E27FC236}">
+                  <a16:creationId xmlns:a16="http://schemas.microsoft.com/office/drawing/2014/main" id="{2C00E349-871A-97E4-FB4B-B17EC5F7B137}"/>
+                </a:ext>
+              </a:extLst>
+            </p:cNvPr>
+            <p:cNvPicPr>
+              <a:picLocks noChangeAspect="1" noChangeArrowheads="1"/>
+            </p:cNvPicPr>
+            <p:nvPr/>
+          </p:nvPicPr>
+          <p:blipFill>
+            <a:blip r:embed="rId3">
+              <a:extLst>
+                <a:ext uri="{28A0092B-C50C-407E-A947-70E740481C1C}">
+                  <a14:useLocalDpi xmlns:a14="http://schemas.microsoft.com/office/drawing/2010/main" val="0"/>
+                </a:ext>
+              </a:extLst>
+            </a:blip>
+            <a:srcRect/>
+            <a:stretch>
+              <a:fillRect/>
+            </a:stretch>
+          </p:blipFill>
+          <p:spPr bwMode="auto">
+            <a:xfrm>
+              <a:off x="7863054" y="3020681"/>
+              <a:ext cx="911156" cy="816638"/>
+            </a:xfrm>
+            <a:prstGeom prst="rect">
+              <a:avLst/>
+            </a:prstGeom>
+            <a:noFill/>
+            <a:extLst>
+              <a:ext uri="{909E8E84-426E-40DD-AFC4-6F175D3DCCD1}">
+                <a14:hiddenFill xmlns:a14="http://schemas.microsoft.com/office/drawing/2010/main">
+                  <a:solidFill>
+                    <a:srgbClr val="FFFFFF"/>
+                  </a:solidFill>
+                </a14:hiddenFill>
+              </a:ext>
+            </a:extLst>
+          </p:spPr>
+        </p:pic>
+      </p:grpSp>
+    </p:spTree>
+    <p:extLst>
+      <p:ext uri="{BB962C8B-B14F-4D97-AF65-F5344CB8AC3E}">
+        <p14:creationId xmlns:p14="http://schemas.microsoft.com/office/powerpoint/2010/main" val="217853337"/>
+      </p:ext>
+    </p:extLst>
+  </p:cSld>
+  <p:clrMapOvr>
+    <a:masterClrMapping/>
+  </p:clrMapOvr>
+  <p:timing>
+    <p:tnLst>
+      <p:par>
+        <p:cTn id="1" dur="indefinite" restart="never" nodeType="tmRoot">
+          <p:childTnLst>
+            <p:seq concurrent="1" nextAc="seek">
+              <p:cTn id="2" dur="indefinite" nodeType="mainSeq">
+                <p:childTnLst>
+                  <p:par>
+                    <p:cTn id="3" fill="hold">
+                      <p:stCondLst>
+                        <p:cond delay="indefinite"/>
+                      </p:stCondLst>
+                      <p:childTnLst>
+                        <p:par>
+                          <p:cTn id="4" fill="hold">
+                            <p:stCondLst>
+                              <p:cond delay="0"/>
+                            </p:stCondLst>
+                            <p:childTnLst>
+                              <p:par>
+                                <p:cTn id="5" presetID="1" presetClass="entr" presetSubtype="0" fill="hold" grpId="0" nodeType="clickEffect">
+                                  <p:stCondLst>
+                                    <p:cond delay="0"/>
+                                  </p:stCondLst>
+                                  <p:childTnLst>
+                                    <p:set>
+                                      <p:cBhvr>
+                                        <p:cTn id="6" dur="1" fill="hold">
+                                          <p:stCondLst>
+                                            <p:cond delay="0"/>
+                                          </p:stCondLst>
+                                        </p:cTn>
+                                        <p:tgtEl>
+                                          <p:spTgt spid="3">
+                                            <p:txEl>
+                                              <p:pRg st="0" end="0"/>
+                                            </p:txEl>
+                                          </p:spTgt>
+                                        </p:tgtEl>
+                                        <p:attrNameLst>
+                                          <p:attrName>style.visibility</p:attrName>
+                                        </p:attrNameLst>
+                                      </p:cBhvr>
+                                      <p:to>
+                                        <p:strVal val="visible"/>
+                                      </p:to>
+                                    </p:set>
+                                  </p:childTnLst>
+                                </p:cTn>
+                              </p:par>
+                            </p:childTnLst>
+                          </p:cTn>
+                        </p:par>
+                      </p:childTnLst>
+                    </p:cTn>
+                  </p:par>
+                  <p:par>
+                    <p:cTn id="7" fill="hold">
+                      <p:stCondLst>
+                        <p:cond delay="indefinite"/>
+                      </p:stCondLst>
+                      <p:childTnLst>
+                        <p:par>
+                          <p:cTn id="8" fill="hold">
+                            <p:stCondLst>
+                              <p:cond delay="0"/>
+                            </p:stCondLst>
+                            <p:childTnLst>
+                              <p:par>
+                                <p:cTn id="9" presetID="1" presetClass="entr" presetSubtype="0" fill="hold" grpId="0" nodeType="clickEffect">
+                                  <p:stCondLst>
+                                    <p:cond delay="0"/>
+                                  </p:stCondLst>
+                                  <p:childTnLst>
+                                    <p:set>
+                                      <p:cBhvr>
+                                        <p:cTn id="10" dur="1" fill="hold">
+                                          <p:stCondLst>
+                                            <p:cond delay="0"/>
+                                          </p:stCondLst>
+                                        </p:cTn>
+                                        <p:tgtEl>
+                                          <p:spTgt spid="3">
+                                            <p:txEl>
+                                              <p:pRg st="1" end="1"/>
+                                            </p:txEl>
+                                          </p:spTgt>
+                                        </p:tgtEl>
+                                        <p:attrNameLst>
+                                          <p:attrName>style.visibility</p:attrName>
+                                        </p:attrNameLst>
+                                      </p:cBhvr>
+                                      <p:to>
+                                        <p:strVal val="visible"/>
+                                      </p:to>
+                                    </p:set>
+                                  </p:childTnLst>
+                                </p:cTn>
+                              </p:par>
+                            </p:childTnLst>
+                          </p:cTn>
+                        </p:par>
+                      </p:childTnLst>
+                    </p:cTn>
+                  </p:par>
+                  <p:par>
+                    <p:cTn id="11" fill="hold">
+                      <p:stCondLst>
+                        <p:cond delay="indefinite"/>
+                      </p:stCondLst>
+                      <p:childTnLst>
+                        <p:par>
+                          <p:cTn id="12" fill="hold">
+                            <p:stCondLst>
+                              <p:cond delay="0"/>
+                            </p:stCondLst>
+                            <p:childTnLst>
+                              <p:par>
+                                <p:cTn id="13" presetID="1" presetClass="entr" presetSubtype="0" fill="hold" nodeType="clickEffect">
+                                  <p:stCondLst>
+                                    <p:cond delay="0"/>
+                                  </p:stCondLst>
+                                  <p:childTnLst>
+                                    <p:set>
+                                      <p:cBhvr>
+                                        <p:cTn id="14" dur="1" fill="hold">
+                                          <p:stCondLst>
+                                            <p:cond delay="0"/>
+                                          </p:stCondLst>
+                                        </p:cTn>
+                                        <p:tgtEl>
+                                          <p:spTgt spid="11"/>
+                                        </p:tgtEl>
+                                        <p:attrNameLst>
+                                          <p:attrName>style.visibility</p:attrName>
+                                        </p:attrNameLst>
+                                      </p:cBhvr>
+                                      <p:to>
+                                        <p:strVal val="visible"/>
+                                      </p:to>
+                                    </p:set>
+                                  </p:childTnLst>
+                                </p:cTn>
+                              </p:par>
+                            </p:childTnLst>
+                          </p:cTn>
+                        </p:par>
+                      </p:childTnLst>
+                    </p:cTn>
+                  </p:par>
+                  <p:par>
+                    <p:cTn id="15" fill="hold">
+                      <p:stCondLst>
+                        <p:cond delay="indefinite"/>
+                      </p:stCondLst>
+                      <p:childTnLst>
+                        <p:par>
+                          <p:cTn id="16" fill="hold">
+                            <p:stCondLst>
+                              <p:cond delay="0"/>
+                            </p:stCondLst>
+                            <p:childTnLst>
+                              <p:par>
+                                <p:cTn id="17" presetID="1" presetClass="entr" presetSubtype="0" fill="hold" nodeType="clickEffect">
+                                  <p:stCondLst>
+                                    <p:cond delay="0"/>
+                                  </p:stCondLst>
+                                  <p:childTnLst>
+                                    <p:set>
+                                      <p:cBhvr>
+                                        <p:cTn id="18" dur="1" fill="hold">
+                                          <p:stCondLst>
+                                            <p:cond delay="0"/>
+                                          </p:stCondLst>
+                                        </p:cTn>
+                                        <p:tgtEl>
+                                          <p:spTgt spid="2"/>
+                                        </p:tgtEl>
+                                        <p:attrNameLst>
+                                          <p:attrName>style.visibility</p:attrName>
+                                        </p:attrNameLst>
+                                      </p:cBhvr>
+                                      <p:to>
+                                        <p:strVal val="visible"/>
+                                      </p:to>
+                                    </p:set>
+                                  </p:childTnLst>
+                                </p:cTn>
+                              </p:par>
+                            </p:childTnLst>
+                          </p:cTn>
+                        </p:par>
+                      </p:childTnLst>
+                    </p:cTn>
+                  </p:par>
+                </p:childTnLst>
+              </p:cTn>
+              <p:prevCondLst>
+                <p:cond evt="onPrev" delay="0">
+                  <p:tgtEl>
+                    <p:sldTgt/>
+                  </p:tgtEl>
+                </p:cond>
+              </p:prevCondLst>
+              <p:nextCondLst>
+                <p:cond evt="onNext" delay="0">
+                  <p:tgtEl>
+                    <p:sldTgt/>
+                  </p:tgtEl>
+                </p:cond>
+              </p:nextCondLst>
+            </p:seq>
+          </p:childTnLst>
+        </p:cTn>
+      </p:par>
+    </p:tnLst>
+    <p:bldLst>
+      <p:bldP spid="3" grpId="0" build="p"/>
+    </p:bldLst>
+  </p:timing>
+</p:sld>
+</file>
+
+<file path=ppt/slides/slide6.xml><?xml version="1.0" encoding="utf-8"?>
+<p:sld xmlns:a="http://schemas.openxmlformats.org/drawingml/2006/main" xmlns:r="http://schemas.openxmlformats.org/officeDocument/2006/relationships" xmlns:p="http://schemas.openxmlformats.org/presentationml/2006/main">
+  <p:cSld>
+    <p:spTree>
+      <p:nvGrpSpPr>
+        <p:cNvPr id="1" name=""/>
+        <p:cNvGrpSpPr/>
+        <p:nvPr/>
+      </p:nvGrpSpPr>
+      <p:grpSpPr>
+        <a:xfrm>
+          <a:off x="0" y="0"/>
+          <a:ext cx="0" cy="0"/>
+          <a:chOff x="0" y="0"/>
+          <a:chExt cx="0" cy="0"/>
+        </a:xfrm>
+      </p:grpSpPr>
+      <p:sp>
+        <p:nvSpPr>
+          <p:cNvPr id="3" name="Content Placeholder 2">
+            <a:extLst>
+              <a:ext uri="{FF2B5EF4-FFF2-40B4-BE49-F238E27FC236}">
+                <a16:creationId xmlns:a16="http://schemas.microsoft.com/office/drawing/2014/main" id="{21336F44-0E2B-08BE-B698-4861DE2ED2C3}"/>
+              </a:ext>
+            </a:extLst>
+          </p:cNvPr>
+          <p:cNvSpPr>
+            <a:spLocks noGrp="1"/>
+          </p:cNvSpPr>
+          <p:nvPr>
+            <p:ph idx="1"/>
+          </p:nvPr>
+        </p:nvSpPr>
+        <p:spPr>
+          <a:xfrm>
+            <a:off x="335664" y="1516186"/>
+            <a:ext cx="6457022" cy="816468"/>
+          </a:xfrm>
+        </p:spPr>
+        <p:txBody>
+          <a:bodyPr/>
+          <a:lstStyle/>
+          <a:p>
+            <a:r>
+              <a:rPr lang="en-CA" dirty="0"/>
+              <a:t>Sort observations into three tiers according to </a:t>
+            </a:r>
+            <a:r>
+              <a:rPr lang="en-CA" i="1" dirty="0"/>
+              <a:t>H index</a:t>
+            </a:r>
+          </a:p>
+          <a:p>
+            <a:r>
+              <a:rPr lang="en-CA" dirty="0"/>
+              <a:t>Higher Tier </a:t>
+            </a:r>
+            <a:r>
+              <a:rPr lang="en-CA" dirty="0">
+                <a:sym typeface="Wingdings" panose="05000000000000000000" pitchFamily="2" charset="2"/>
+              </a:rPr>
+              <a:t> Higher Publication Prestige</a:t>
+            </a:r>
+            <a:endParaRPr lang="en-CA" dirty="0"/>
+          </a:p>
+        </p:txBody>
+      </p:sp>
+      <p:sp>
+        <p:nvSpPr>
+          <p:cNvPr id="4" name="Slide Number Placeholder 3">
+            <a:extLst>
+              <a:ext uri="{FF2B5EF4-FFF2-40B4-BE49-F238E27FC236}">
+                <a16:creationId xmlns:a16="http://schemas.microsoft.com/office/drawing/2014/main" id="{7A702211-722C-C888-3843-2BB8F131482F}"/>
+              </a:ext>
+            </a:extLst>
+          </p:cNvPr>
+          <p:cNvSpPr>
+            <a:spLocks noGrp="1"/>
+          </p:cNvSpPr>
+          <p:nvPr>
+            <p:ph type="sldNum" sz="quarter" idx="12"/>
+          </p:nvPr>
+        </p:nvSpPr>
+        <p:spPr/>
+        <p:txBody>
+          <a:bodyPr/>
+          <a:lstStyle/>
+          <a:p>
+            <a:fld id="{783C90D1-AD4B-442F-A893-0023CEF97D6F}" type="slidenum">
+              <a:rPr lang="en-CA" smtClean="0"/>
+              <a:t>6</a:t>
+            </a:fld>
+            <a:endParaRPr lang="en-CA" dirty="0"/>
+          </a:p>
+        </p:txBody>
+      </p:sp>
+      <p:sp>
+        <p:nvSpPr>
+          <p:cNvPr id="5" name="Title 1">
+            <a:extLst>
+              <a:ext uri="{FF2B5EF4-FFF2-40B4-BE49-F238E27FC236}">
+                <a16:creationId xmlns:a16="http://schemas.microsoft.com/office/drawing/2014/main" id="{F9304593-A276-8C2A-E986-D9A14769B8F6}"/>
+              </a:ext>
+            </a:extLst>
+          </p:cNvPr>
+          <p:cNvSpPr>
+            <a:spLocks noGrp="1"/>
+          </p:cNvSpPr>
+          <p:nvPr>
+            <p:ph type="title"/>
+          </p:nvPr>
+        </p:nvSpPr>
+        <p:spPr>
+          <a:xfrm>
+            <a:off x="186486" y="0"/>
+            <a:ext cx="7357336" cy="1516185"/>
+          </a:xfrm>
+        </p:spPr>
+        <p:txBody>
+          <a:bodyPr vert="horz" lIns="91440" tIns="45720" rIns="91440" bIns="45720" rtlCol="0" anchor="b">
+            <a:normAutofit/>
+          </a:bodyPr>
+          <a:lstStyle/>
+          <a:p>
+            <a:r>
+              <a:rPr lang="en-US" sz="4800" kern="1200" dirty="0">
+                <a:solidFill>
+                  <a:schemeClr val="tx1"/>
+                </a:solidFill>
+                <a:latin typeface="+mj-lt"/>
+                <a:ea typeface="+mj-ea"/>
+                <a:cs typeface="+mj-cs"/>
+              </a:rPr>
+              <a:t>Defining Target Variable</a:t>
+            </a:r>
+          </a:p>
+        </p:txBody>
+      </p:sp>
+      <p:pic>
+        <p:nvPicPr>
+          <p:cNvPr id="11" name="Picture 10">
+            <a:extLst>
+              <a:ext uri="{FF2B5EF4-FFF2-40B4-BE49-F238E27FC236}">
+                <a16:creationId xmlns:a16="http://schemas.microsoft.com/office/drawing/2014/main" id="{BAE41C1C-C36D-4445-0E7D-F6674D5247C0}"/>
+              </a:ext>
+            </a:extLst>
+          </p:cNvPr>
+          <p:cNvPicPr>
+            <a:picLocks noChangeAspect="1"/>
+          </p:cNvPicPr>
+          <p:nvPr/>
+        </p:nvPicPr>
+        <p:blipFill>
+          <a:blip r:embed="rId2">
+            <a:extLst>
+              <a:ext uri="{28A0092B-C50C-407E-A947-70E740481C1C}">
+                <a14:useLocalDpi xmlns:a14="http://schemas.microsoft.com/office/drawing/2010/main" val="0"/>
+              </a:ext>
+            </a:extLst>
+          </a:blip>
+          <a:srcRect/>
+          <a:stretch/>
+        </p:blipFill>
+        <p:spPr>
+          <a:xfrm>
+            <a:off x="338701" y="2505670"/>
+            <a:ext cx="5891349" cy="2677886"/>
+          </a:xfrm>
+          <a:prstGeom prst="rect">
+            <a:avLst/>
+          </a:prstGeom>
+        </p:spPr>
+      </p:pic>
+      <p:sp>
+        <p:nvSpPr>
+          <p:cNvPr id="7" name="TextBox 6">
+            <a:extLst>
+              <a:ext uri="{FF2B5EF4-FFF2-40B4-BE49-F238E27FC236}">
+                <a16:creationId xmlns:a16="http://schemas.microsoft.com/office/drawing/2014/main" id="{9F61E669-9A43-74CB-C11C-F33953AC67E2}"/>
+              </a:ext>
+            </a:extLst>
+          </p:cNvPr>
+          <p:cNvSpPr txBox="1"/>
+          <p:nvPr/>
+        </p:nvSpPr>
+        <p:spPr>
+          <a:xfrm>
+            <a:off x="6164087" y="2274952"/>
+            <a:ext cx="3398044" cy="3139321"/>
+          </a:xfrm>
+          <a:prstGeom prst="rect">
+            <a:avLst/>
+          </a:prstGeom>
+          <a:noFill/>
+        </p:spPr>
+        <p:txBody>
+          <a:bodyPr wrap="square" rtlCol="0">
+            <a:spAutoFit/>
+          </a:bodyPr>
+          <a:lstStyle/>
+          <a:p>
+            <a:pPr algn="ctr"/>
+            <a:r>
+              <a:rPr lang="en-CA" b="1" u="sng" dirty="0"/>
+              <a:t>Findings </a:t>
+            </a:r>
+          </a:p>
+          <a:p>
+            <a:pPr algn="ctr"/>
+            <a:endParaRPr lang="en-CA" b="1" u="sng" dirty="0"/>
+          </a:p>
+          <a:p>
+            <a:pPr marL="285750" indent="-285750">
+              <a:buFont typeface="Arial" panose="020B0604020202020204" pitchFamily="34" charset="0"/>
+              <a:buChar char="•"/>
+            </a:pPr>
+            <a:r>
+              <a:rPr lang="en-CA" dirty="0"/>
+              <a:t>Tiers have overlapping ranges, </a:t>
+            </a:r>
+            <a:r>
+              <a:rPr lang="en-CA" b="1" i="1" dirty="0"/>
+              <a:t>could lead to classification issues </a:t>
+            </a:r>
+            <a:r>
+              <a:rPr lang="en-CA" dirty="0"/>
+              <a:t>later on.</a:t>
+            </a:r>
+          </a:p>
+          <a:p>
+            <a:endParaRPr lang="en-CA" dirty="0"/>
+          </a:p>
+          <a:p>
+            <a:pPr marL="285750" indent="-285750">
+              <a:buFont typeface="Arial" panose="020B0604020202020204" pitchFamily="34" charset="0"/>
+              <a:buChar char="•"/>
+            </a:pPr>
+            <a:r>
+              <a:rPr lang="en-CA" dirty="0"/>
+              <a:t>Median &amp; IQR increase with Tier level.</a:t>
+            </a:r>
+          </a:p>
+          <a:p>
+            <a:pPr marL="285750" indent="-285750">
+              <a:buFont typeface="Arial" panose="020B0604020202020204" pitchFamily="34" charset="0"/>
+              <a:buChar char="•"/>
+            </a:pPr>
+            <a:endParaRPr lang="en-CA" dirty="0"/>
+          </a:p>
+          <a:p>
+            <a:pPr marL="285750" indent="-285750">
+              <a:buFont typeface="Arial" panose="020B0604020202020204" pitchFamily="34" charset="0"/>
+              <a:buChar char="•"/>
+            </a:pPr>
+            <a:endParaRPr lang="en-CA" dirty="0"/>
+          </a:p>
+        </p:txBody>
+      </p:sp>
+      <p:grpSp>
+        <p:nvGrpSpPr>
+          <p:cNvPr id="15" name="Group 14">
+            <a:extLst>
+              <a:ext uri="{FF2B5EF4-FFF2-40B4-BE49-F238E27FC236}">
+                <a16:creationId xmlns:a16="http://schemas.microsoft.com/office/drawing/2014/main" id="{3C078529-F6EB-4ED1-E2A7-1F1BA16A66AE}"/>
+              </a:ext>
+            </a:extLst>
+          </p:cNvPr>
+          <p:cNvGrpSpPr/>
+          <p:nvPr/>
+        </p:nvGrpSpPr>
+        <p:grpSpPr>
+          <a:xfrm>
+            <a:off x="648478" y="4114885"/>
+            <a:ext cx="3317033" cy="1691714"/>
+            <a:chOff x="648478" y="4114885"/>
+            <a:chExt cx="3317033" cy="1691714"/>
+          </a:xfrm>
+        </p:grpSpPr>
+        <p:sp>
+          <p:nvSpPr>
+            <p:cNvPr id="6" name="Oval 5">
+              <a:extLst>
+                <a:ext uri="{FF2B5EF4-FFF2-40B4-BE49-F238E27FC236}">
+                  <a16:creationId xmlns:a16="http://schemas.microsoft.com/office/drawing/2014/main" id="{F073671E-664C-F88D-E1CF-0508932CF1BE}"/>
+                </a:ext>
+              </a:extLst>
+            </p:cNvPr>
+            <p:cNvSpPr/>
+            <p:nvPr/>
+          </p:nvSpPr>
+          <p:spPr>
+            <a:xfrm>
+              <a:off x="2453950" y="4114885"/>
+              <a:ext cx="830425" cy="382555"/>
+            </a:xfrm>
+            <a:prstGeom prst="ellipse">
+              <a:avLst/>
+            </a:prstGeom>
+            <a:noFill/>
+            <a:ln w="38100">
+              <a:solidFill>
+                <a:srgbClr val="FF0000"/>
+              </a:solidFill>
+            </a:ln>
+          </p:spPr>
+          <p:style>
+            <a:lnRef idx="2">
+              <a:schemeClr val="accent1">
+                <a:shade val="50000"/>
+              </a:schemeClr>
+            </a:lnRef>
+            <a:fillRef idx="1">
+              <a:schemeClr val="accent1"/>
+            </a:fillRef>
+            <a:effectRef idx="0">
+              <a:schemeClr val="accent1"/>
+            </a:effectRef>
+            <a:fontRef idx="minor">
+              <a:schemeClr val="lt1"/>
+            </a:fontRef>
+          </p:style>
+          <p:txBody>
+            <a:bodyPr rtlCol="0" anchor="ctr"/>
+            <a:lstStyle/>
+            <a:p>
+              <a:pPr algn="ctr"/>
+              <a:endParaRPr lang="en-CA" dirty="0"/>
+            </a:p>
+          </p:txBody>
+        </p:sp>
+        <p:sp>
+          <p:nvSpPr>
+            <p:cNvPr id="12" name="TextBox 11">
+              <a:extLst>
+                <a:ext uri="{FF2B5EF4-FFF2-40B4-BE49-F238E27FC236}">
+                  <a16:creationId xmlns:a16="http://schemas.microsoft.com/office/drawing/2014/main" id="{A986C0E7-B6E9-B84A-5168-A1075429A378}"/>
+                </a:ext>
+              </a:extLst>
+            </p:cNvPr>
+            <p:cNvSpPr txBox="1"/>
+            <p:nvPr/>
+          </p:nvSpPr>
+          <p:spPr>
+            <a:xfrm>
+              <a:off x="648478" y="5160268"/>
+              <a:ext cx="3317033" cy="646331"/>
+            </a:xfrm>
+            <a:prstGeom prst="rect">
+              <a:avLst/>
+            </a:prstGeom>
+            <a:noFill/>
+          </p:spPr>
+          <p:txBody>
+            <a:bodyPr wrap="square">
+              <a:spAutoFit/>
+            </a:bodyPr>
+            <a:lstStyle/>
+            <a:p>
+              <a:r>
+                <a:rPr lang="en-CA" dirty="0">
+                  <a:solidFill>
+                    <a:srgbClr val="FF0000"/>
+                  </a:solidFill>
+                </a:rPr>
+                <a:t>Example: Outlier could be better classified in Tier 2?</a:t>
+              </a:r>
+            </a:p>
+          </p:txBody>
+        </p:sp>
+        <p:cxnSp>
+          <p:nvCxnSpPr>
+            <p:cNvPr id="14" name="Straight Arrow Connector 13">
+              <a:extLst>
+                <a:ext uri="{FF2B5EF4-FFF2-40B4-BE49-F238E27FC236}">
+                  <a16:creationId xmlns:a16="http://schemas.microsoft.com/office/drawing/2014/main" id="{D41DCCA0-B908-7603-E9B4-66D70D8E7073}"/>
+                </a:ext>
+              </a:extLst>
+            </p:cNvPr>
+            <p:cNvCxnSpPr>
+              <a:endCxn id="6" idx="4"/>
+            </p:cNvCxnSpPr>
+            <p:nvPr/>
+          </p:nvCxnSpPr>
+          <p:spPr>
+            <a:xfrm flipV="1">
+              <a:off x="2052735" y="4497440"/>
+              <a:ext cx="816428" cy="662828"/>
+            </a:xfrm>
+            <a:prstGeom prst="straightConnector1">
+              <a:avLst/>
+            </a:prstGeom>
+            <a:ln w="57150">
+              <a:solidFill>
+                <a:srgbClr val="FF0000"/>
+              </a:solidFill>
+              <a:tailEnd type="triangle"/>
+            </a:ln>
+          </p:spPr>
+          <p:style>
+            <a:lnRef idx="1">
+              <a:schemeClr val="accent1"/>
+            </a:lnRef>
+            <a:fillRef idx="0">
+              <a:schemeClr val="accent1"/>
+            </a:fillRef>
+            <a:effectRef idx="0">
+              <a:schemeClr val="accent1"/>
+            </a:effectRef>
+            <a:fontRef idx="minor">
+              <a:schemeClr val="tx1"/>
+            </a:fontRef>
+          </p:style>
+        </p:cxnSp>
+      </p:grpSp>
+      <p:sp>
+        <p:nvSpPr>
+          <p:cNvPr id="16" name="TextBox 15">
+            <a:extLst>
+              <a:ext uri="{FF2B5EF4-FFF2-40B4-BE49-F238E27FC236}">
+                <a16:creationId xmlns:a16="http://schemas.microsoft.com/office/drawing/2014/main" id="{AF986E21-5B44-ECC7-FE06-13E936F77087}"/>
+              </a:ext>
+            </a:extLst>
+          </p:cNvPr>
+          <p:cNvSpPr txBox="1"/>
+          <p:nvPr/>
+        </p:nvSpPr>
+        <p:spPr>
+          <a:xfrm>
+            <a:off x="3965511" y="5207048"/>
+            <a:ext cx="5441753" cy="923330"/>
+          </a:xfrm>
+          <a:prstGeom prst="rect">
+            <a:avLst/>
+          </a:prstGeom>
+          <a:noFill/>
+        </p:spPr>
+        <p:txBody>
+          <a:bodyPr wrap="square">
+            <a:spAutoFit/>
+          </a:bodyPr>
+          <a:lstStyle/>
+          <a:p>
+            <a:r>
+              <a:rPr lang="en-CA" dirty="0">
+                <a:solidFill>
+                  <a:srgbClr val="002060"/>
+                </a:solidFill>
+              </a:rPr>
+              <a:t>As Tier Level ↑ Variation in Data ↑</a:t>
+            </a:r>
+          </a:p>
+          <a:p>
+            <a:endParaRPr lang="en-CA" dirty="0">
+              <a:solidFill>
+                <a:srgbClr val="002060"/>
+              </a:solidFill>
+            </a:endParaRPr>
+          </a:p>
+          <a:p>
+            <a:r>
+              <a:rPr lang="en-CA" dirty="0">
+                <a:solidFill>
+                  <a:srgbClr val="002060"/>
+                </a:solidFill>
+              </a:rPr>
+              <a:t>Mismatch Variation </a:t>
+            </a:r>
+            <a:r>
+              <a:rPr lang="en-CA" dirty="0">
+                <a:solidFill>
+                  <a:srgbClr val="002060"/>
+                </a:solidFill>
+                <a:sym typeface="Wingdings" panose="05000000000000000000" pitchFamily="2" charset="2"/>
+              </a:rPr>
+              <a:t></a:t>
+            </a:r>
+            <a:r>
+              <a:rPr lang="en-CA" dirty="0">
+                <a:solidFill>
+                  <a:srgbClr val="002060"/>
+                </a:solidFill>
+              </a:rPr>
+              <a:t> More Classification issues  </a:t>
+            </a:r>
+          </a:p>
+        </p:txBody>
+      </p:sp>
+    </p:spTree>
+    <p:extLst>
+      <p:ext uri="{BB962C8B-B14F-4D97-AF65-F5344CB8AC3E}">
+        <p14:creationId xmlns:p14="http://schemas.microsoft.com/office/powerpoint/2010/main" val="3798833962"/>
+      </p:ext>
+    </p:extLst>
+  </p:cSld>
+  <p:clrMapOvr>
+    <a:masterClrMapping/>
+  </p:clrMapOvr>
+  <p:timing>
+    <p:tnLst>
+      <p:par>
+        <p:cTn id="1" dur="indefinite" restart="never" nodeType="tmRoot">
+          <p:childTnLst>
+            <p:seq concurrent="1" nextAc="seek">
+              <p:cTn id="2" dur="indefinite" nodeType="mainSeq">
+                <p:childTnLst>
+                  <p:par>
+                    <p:cTn id="3" fill="hold">
+                      <p:stCondLst>
+                        <p:cond delay="indefinite"/>
+                      </p:stCondLst>
+                      <p:childTnLst>
+                        <p:par>
+                          <p:cTn id="4" fill="hold">
+                            <p:stCondLst>
+                              <p:cond delay="0"/>
+                            </p:stCondLst>
+                            <p:childTnLst>
+                              <p:par>
+                                <p:cTn id="5" presetID="1" presetClass="entr" presetSubtype="0" fill="hold" nodeType="clickEffect">
+                                  <p:stCondLst>
+                                    <p:cond delay="0"/>
+                                  </p:stCondLst>
+                                  <p:childTnLst>
+                                    <p:set>
+                                      <p:cBhvr>
+                                        <p:cTn id="6" dur="1" fill="hold">
+                                          <p:stCondLst>
+                                            <p:cond delay="0"/>
+                                          </p:stCondLst>
+                                        </p:cTn>
+                                        <p:tgtEl>
+                                          <p:spTgt spid="7">
+                                            <p:txEl>
+                                              <p:pRg st="0" end="0"/>
+                                            </p:txEl>
+                                          </p:spTgt>
+                                        </p:tgtEl>
+                                        <p:attrNameLst>
+                                          <p:attrName>style.visibility</p:attrName>
+                                        </p:attrNameLst>
+                                      </p:cBhvr>
+                                      <p:to>
+                                        <p:strVal val="visible"/>
+                                      </p:to>
+                                    </p:set>
+                                  </p:childTnLst>
+                                </p:cTn>
+                              </p:par>
+                            </p:childTnLst>
+                          </p:cTn>
+                        </p:par>
+                      </p:childTnLst>
+                    </p:cTn>
+                  </p:par>
+                  <p:par>
+                    <p:cTn id="7" fill="hold">
+                      <p:stCondLst>
+                        <p:cond delay="indefinite"/>
+                      </p:stCondLst>
+                      <p:childTnLst>
+                        <p:par>
+                          <p:cTn id="8" fill="hold">
+                            <p:stCondLst>
+                              <p:cond delay="0"/>
+                            </p:stCondLst>
+                            <p:childTnLst>
+                              <p:par>
+                                <p:cTn id="9" presetID="1" presetClass="entr" presetSubtype="0" fill="hold" nodeType="clickEffect">
+                                  <p:stCondLst>
+                                    <p:cond delay="0"/>
+                                  </p:stCondLst>
+                                  <p:childTnLst>
+                                    <p:set>
+                                      <p:cBhvr>
+                                        <p:cTn id="10" dur="1" fill="hold">
+                                          <p:stCondLst>
+                                            <p:cond delay="0"/>
+                                          </p:stCondLst>
+                                        </p:cTn>
+                                        <p:tgtEl>
+                                          <p:spTgt spid="7">
+                                            <p:txEl>
+                                              <p:pRg st="2" end="2"/>
+                                            </p:txEl>
+                                          </p:spTgt>
+                                        </p:tgtEl>
+                                        <p:attrNameLst>
+                                          <p:attrName>style.visibility</p:attrName>
+                                        </p:attrNameLst>
+                                      </p:cBhvr>
+                                      <p:to>
+                                        <p:strVal val="visible"/>
+                                      </p:to>
+                                    </p:set>
+                                  </p:childTnLst>
+                                </p:cTn>
+                              </p:par>
+                            </p:childTnLst>
+                          </p:cTn>
+                        </p:par>
+                      </p:childTnLst>
+                    </p:cTn>
+                  </p:par>
+                  <p:par>
+                    <p:cTn id="11" fill="hold">
+                      <p:stCondLst>
+                        <p:cond delay="indefinite"/>
+                      </p:stCondLst>
+                      <p:childTnLst>
+                        <p:par>
+                          <p:cTn id="12" fill="hold">
+                            <p:stCondLst>
+                              <p:cond delay="0"/>
+                            </p:stCondLst>
+                            <p:childTnLst>
+                              <p:par>
+                                <p:cTn id="13" presetID="1" presetClass="entr" presetSubtype="0" fill="hold" nodeType="clickEffect">
+                                  <p:stCondLst>
+                                    <p:cond delay="0"/>
+                                  </p:stCondLst>
+                                  <p:childTnLst>
+                                    <p:set>
+                                      <p:cBhvr>
+                                        <p:cTn id="14" dur="1" fill="hold">
+                                          <p:stCondLst>
+                                            <p:cond delay="0"/>
+                                          </p:stCondLst>
+                                        </p:cTn>
+                                        <p:tgtEl>
+                                          <p:spTgt spid="15"/>
+                                        </p:tgtEl>
+                                        <p:attrNameLst>
+                                          <p:attrName>style.visibility</p:attrName>
+                                        </p:attrNameLst>
+                                      </p:cBhvr>
+                                      <p:to>
+                                        <p:strVal val="visible"/>
+                                      </p:to>
+                                    </p:set>
+                                  </p:childTnLst>
+                                </p:cTn>
+                              </p:par>
+                            </p:childTnLst>
+                          </p:cTn>
+                        </p:par>
+                      </p:childTnLst>
+                    </p:cTn>
+                  </p:par>
+                  <p:par>
+                    <p:cTn id="15" fill="hold">
+                      <p:stCondLst>
+                        <p:cond delay="indefinite"/>
+                      </p:stCondLst>
+                      <p:childTnLst>
+                        <p:par>
+                          <p:cTn id="16" fill="hold">
+                            <p:stCondLst>
+                              <p:cond delay="0"/>
+                            </p:stCondLst>
+                            <p:childTnLst>
+                              <p:par>
+                                <p:cTn id="17" presetID="1" presetClass="exit" presetSubtype="0" fill="hold" nodeType="clickEffect">
+                                  <p:stCondLst>
+                                    <p:cond delay="0"/>
+                                  </p:stCondLst>
+                                  <p:childTnLst>
+                                    <p:set>
+                                      <p:cBhvr>
+                                        <p:cTn id="18" dur="1" fill="hold">
+                                          <p:stCondLst>
+                                            <p:cond delay="0"/>
+                                          </p:stCondLst>
+                                        </p:cTn>
+                                        <p:tgtEl>
+                                          <p:spTgt spid="15"/>
+                                        </p:tgtEl>
+                                        <p:attrNameLst>
+                                          <p:attrName>style.visibility</p:attrName>
+                                        </p:attrNameLst>
+                                      </p:cBhvr>
+                                      <p:to>
+                                        <p:strVal val="hidden"/>
+                                      </p:to>
+                                    </p:set>
+                                  </p:childTnLst>
+                                </p:cTn>
+                              </p:par>
+                              <p:par>
+                                <p:cTn id="19" presetID="1" presetClass="entr" presetSubtype="0" fill="hold" nodeType="withEffect">
+                                  <p:stCondLst>
+                                    <p:cond delay="0"/>
+                                  </p:stCondLst>
+                                  <p:childTnLst>
+                                    <p:set>
+                                      <p:cBhvr>
+                                        <p:cTn id="20" dur="1" fill="hold">
+                                          <p:stCondLst>
+                                            <p:cond delay="0"/>
+                                          </p:stCondLst>
+                                        </p:cTn>
+                                        <p:tgtEl>
+                                          <p:spTgt spid="7">
+                                            <p:txEl>
+                                              <p:pRg st="4" end="4"/>
+                                            </p:txEl>
+                                          </p:spTgt>
+                                        </p:tgtEl>
+                                        <p:attrNameLst>
+                                          <p:attrName>style.visibility</p:attrName>
+                                        </p:attrNameLst>
+                                      </p:cBhvr>
+                                      <p:to>
+                                        <p:strVal val="visible"/>
+                                      </p:to>
+                                    </p:set>
+                                  </p:childTnLst>
+                                </p:cTn>
+                              </p:par>
+                            </p:childTnLst>
+                          </p:cTn>
+                        </p:par>
+                      </p:childTnLst>
+                    </p:cTn>
+                  </p:par>
+                  <p:par>
+                    <p:cTn id="21" fill="hold">
+                      <p:stCondLst>
+                        <p:cond delay="indefinite"/>
+                      </p:stCondLst>
+                      <p:childTnLst>
+                        <p:par>
+                          <p:cTn id="22" fill="hold">
+                            <p:stCondLst>
+                              <p:cond delay="0"/>
+                            </p:stCondLst>
+                            <p:childTnLst>
+                              <p:par>
+                                <p:cTn id="23" presetID="1" presetClass="entr" presetSubtype="0" fill="hold" nodeType="clickEffect">
+                                  <p:stCondLst>
+                                    <p:cond delay="0"/>
+                                  </p:stCondLst>
+                                  <p:childTnLst>
+                                    <p:set>
+                                      <p:cBhvr>
+                                        <p:cTn id="24" dur="1" fill="hold">
+                                          <p:stCondLst>
+                                            <p:cond delay="0"/>
+                                          </p:stCondLst>
+                                        </p:cTn>
+                                        <p:tgtEl>
+                                          <p:spTgt spid="16">
+                                            <p:txEl>
+                                              <p:pRg st="0" end="0"/>
+                                            </p:txEl>
+                                          </p:spTgt>
+                                        </p:tgtEl>
+                                        <p:attrNameLst>
+                                          <p:attrName>style.visibility</p:attrName>
+                                        </p:attrNameLst>
+                                      </p:cBhvr>
+                                      <p:to>
+                                        <p:strVal val="visible"/>
+                                      </p:to>
+                                    </p:set>
+                                  </p:childTnLst>
+                                </p:cTn>
+                              </p:par>
+                            </p:childTnLst>
+                          </p:cTn>
+                        </p:par>
+                      </p:childTnLst>
+                    </p:cTn>
+                  </p:par>
+                  <p:par>
+                    <p:cTn id="25" fill="hold">
+                      <p:stCondLst>
+                        <p:cond delay="indefinite"/>
+                      </p:stCondLst>
+                      <p:childTnLst>
+                        <p:par>
+                          <p:cTn id="26" fill="hold">
+                            <p:stCondLst>
+                              <p:cond delay="0"/>
+                            </p:stCondLst>
+                            <p:childTnLst>
+                              <p:par>
+                                <p:cTn id="27" presetID="1" presetClass="entr" presetSubtype="0" fill="hold" nodeType="clickEffect">
+                                  <p:stCondLst>
+                                    <p:cond delay="0"/>
+                                  </p:stCondLst>
+                                  <p:childTnLst>
+                                    <p:set>
+                                      <p:cBhvr>
+                                        <p:cTn id="28" dur="1" fill="hold">
+                                          <p:stCondLst>
+                                            <p:cond delay="0"/>
+                                          </p:stCondLst>
+                                        </p:cTn>
+                                        <p:tgtEl>
+                                          <p:spTgt spid="16">
+                                            <p:txEl>
+                                              <p:pRg st="2" end="2"/>
+                                            </p:txEl>
+                                          </p:spTgt>
+                                        </p:tgtEl>
+                                        <p:attrNameLst>
+                                          <p:attrName>style.visibility</p:attrName>
+                                        </p:attrNameLst>
+                                      </p:cBhvr>
+                                      <p:to>
+                                        <p:strVal val="visible"/>
+                                      </p:to>
+                                    </p:set>
+                                  </p:childTnLst>
+                                </p:cTn>
+                              </p:par>
+                            </p:childTnLst>
+                          </p:cTn>
+                        </p:par>
+                      </p:childTnLst>
+                    </p:cTn>
+                  </p:par>
+                </p:childTnLst>
+              </p:cTn>
+              <p:prevCondLst>
+                <p:cond evt="onPrev" delay="0">
+                  <p:tgtEl>
+                    <p:sldTgt/>
+                  </p:tgtEl>
+                </p:cond>
+              </p:prevCondLst>
+              <p:nextCondLst>
+                <p:cond evt="onNext" delay="0">
+                  <p:tgtEl>
+                    <p:sldTgt/>
+                  </p:tgtEl>
+                </p:cond>
+              </p:nextCondLst>
+            </p:seq>
+          </p:childTnLst>
+        </p:cTn>
+      </p:par>
+    </p:tnLst>
+  </p:timing>
+</p:sld>
+</file>
+
+<file path=ppt/slides/slide7.xml><?xml version="1.0" encoding="utf-8"?>
+<p:sld xmlns:a="http://schemas.openxmlformats.org/drawingml/2006/main" xmlns:r="http://schemas.openxmlformats.org/officeDocument/2006/relationships" xmlns:p="http://schemas.openxmlformats.org/presentationml/2006/main">
+  <p:cSld>
+    <p:bg>
+      <p:bgPr>
+        <a:solidFill>
+          <a:schemeClr val="bg1"/>
+        </a:solidFill>
+        <a:effectLst/>
+      </p:bgPr>
+    </p:bg>
+    <p:spTree>
+      <p:nvGrpSpPr>
+        <p:cNvPr id="1" name=""/>
+        <p:cNvGrpSpPr/>
+        <p:nvPr/>
+      </p:nvGrpSpPr>
+      <p:grpSpPr>
+        <a:xfrm>
+          <a:off x="0" y="0"/>
+          <a:ext cx="0" cy="0"/>
+          <a:chOff x="0" y="0"/>
+          <a:chExt cx="0" cy="0"/>
+        </a:xfrm>
+      </p:grpSpPr>
+      <p:sp>
+        <p:nvSpPr>
+          <p:cNvPr id="2" name="Title 1">
+            <a:extLst>
+              <a:ext uri="{FF2B5EF4-FFF2-40B4-BE49-F238E27FC236}">
+                <a16:creationId xmlns:a16="http://schemas.microsoft.com/office/drawing/2014/main" id="{437B3693-1A79-34B5-944C-B789F8A7F8D5}"/>
+              </a:ext>
+            </a:extLst>
+          </p:cNvPr>
+          <p:cNvSpPr>
+            <a:spLocks noGrp="1"/>
+          </p:cNvSpPr>
+          <p:nvPr>
+            <p:ph type="title"/>
+          </p:nvPr>
+        </p:nvSpPr>
+        <p:spPr>
+          <a:xfrm>
+            <a:off x="186486" y="0"/>
+            <a:ext cx="7357336" cy="1516185"/>
+          </a:xfrm>
+        </p:spPr>
+        <p:txBody>
+          <a:bodyPr vert="horz" lIns="91440" tIns="45720" rIns="91440" bIns="45720" rtlCol="0" anchor="b">
+            <a:normAutofit/>
+          </a:bodyPr>
+          <a:lstStyle/>
+          <a:p>
+            <a:r>
+              <a:rPr lang="en-US" sz="4800" kern="1200" dirty="0">
+                <a:solidFill>
+                  <a:schemeClr val="tx1"/>
+                </a:solidFill>
+                <a:latin typeface="+mj-lt"/>
+                <a:ea typeface="+mj-ea"/>
+                <a:cs typeface="+mj-cs"/>
+              </a:rPr>
+              <a:t>Evaluating Models</a:t>
+            </a:r>
+          </a:p>
+        </p:txBody>
+      </p:sp>
+      <p:sp>
+        <p:nvSpPr>
+          <p:cNvPr id="22" name="Slide Number Placeholder 21">
+            <a:extLst>
+              <a:ext uri="{FF2B5EF4-FFF2-40B4-BE49-F238E27FC236}">
+                <a16:creationId xmlns:a16="http://schemas.microsoft.com/office/drawing/2014/main" id="{50E39E65-E39F-5C91-10B6-D5DD43AD0343}"/>
+              </a:ext>
+            </a:extLst>
+          </p:cNvPr>
+          <p:cNvSpPr>
+            <a:spLocks noGrp="1"/>
+          </p:cNvSpPr>
+          <p:nvPr>
+            <p:ph type="sldNum" sz="quarter" idx="12"/>
+          </p:nvPr>
+        </p:nvSpPr>
+        <p:spPr/>
+        <p:txBody>
+          <a:bodyPr/>
+          <a:lstStyle/>
+          <a:p>
+            <a:fld id="{783C90D1-AD4B-442F-A893-0023CEF97D6F}" type="slidenum">
+              <a:rPr lang="en-CA" smtClean="0"/>
+              <a:t>7</a:t>
+            </a:fld>
+            <a:endParaRPr lang="en-CA"/>
+          </a:p>
+        </p:txBody>
+      </p:sp>
+      <p:sp>
+        <p:nvSpPr>
+          <p:cNvPr id="6" name="Content Placeholder 2">
+            <a:extLst>
+              <a:ext uri="{FF2B5EF4-FFF2-40B4-BE49-F238E27FC236}">
+                <a16:creationId xmlns:a16="http://schemas.microsoft.com/office/drawing/2014/main" id="{75991618-05D0-F0AE-A79F-5CA7FBCB5C41}"/>
+              </a:ext>
+            </a:extLst>
+          </p:cNvPr>
+          <p:cNvSpPr>
+            <a:spLocks noGrp="1"/>
+          </p:cNvSpPr>
+          <p:nvPr>
+            <p:ph idx="1"/>
+          </p:nvPr>
+        </p:nvSpPr>
+        <p:spPr>
+          <a:xfrm>
+            <a:off x="335664" y="1801411"/>
+            <a:ext cx="8596668" cy="3880773"/>
+          </a:xfrm>
+        </p:spPr>
+        <p:txBody>
+          <a:bodyPr/>
+          <a:lstStyle/>
+          <a:p>
+            <a:r>
+              <a:rPr lang="en-CA" b="1" dirty="0"/>
+              <a:t>Goal: </a:t>
+            </a:r>
+            <a:r>
+              <a:rPr lang="en-CA" dirty="0"/>
+              <a:t>Classify Publication Entries into 3 Tiers of Prestige, using only metrics of the authors.</a:t>
+            </a:r>
+          </a:p>
+          <a:p>
+            <a:r>
+              <a:rPr lang="en-CA" b="1" dirty="0"/>
+              <a:t>Scoring Function: </a:t>
+            </a:r>
+            <a:r>
+              <a:rPr lang="en-CA" dirty="0"/>
+              <a:t>Average of Accuracy and Weighted Precision</a:t>
+            </a:r>
+          </a:p>
+          <a:p>
+            <a:pPr lvl="1"/>
+            <a:r>
+              <a:rPr lang="en-CA" dirty="0"/>
+              <a:t>Want to achieve a accurate classification while also minimizing as much false positives as much as possible.</a:t>
+            </a:r>
+          </a:p>
+        </p:txBody>
+      </p:sp>
+      <p:grpSp>
+        <p:nvGrpSpPr>
+          <p:cNvPr id="11" name="Group 10">
+            <a:extLst>
+              <a:ext uri="{FF2B5EF4-FFF2-40B4-BE49-F238E27FC236}">
+                <a16:creationId xmlns:a16="http://schemas.microsoft.com/office/drawing/2014/main" id="{9C7935C5-4E43-5F1C-2975-6FB47D9BF7D4}"/>
+              </a:ext>
+            </a:extLst>
+          </p:cNvPr>
+          <p:cNvGrpSpPr/>
+          <p:nvPr/>
+        </p:nvGrpSpPr>
+        <p:grpSpPr>
+          <a:xfrm>
+            <a:off x="819308" y="4163565"/>
+            <a:ext cx="8270905" cy="2034677"/>
+            <a:chOff x="819308" y="4163565"/>
+            <a:chExt cx="8270905" cy="2034677"/>
+          </a:xfrm>
+        </p:grpSpPr>
+        <p:grpSp>
+          <p:nvGrpSpPr>
+            <p:cNvPr id="9" name="Group 8">
+              <a:extLst>
+                <a:ext uri="{FF2B5EF4-FFF2-40B4-BE49-F238E27FC236}">
+                  <a16:creationId xmlns:a16="http://schemas.microsoft.com/office/drawing/2014/main" id="{562CC3E6-6E4F-9AA2-14B3-8BFB9E9DE9C3}"/>
+                </a:ext>
+              </a:extLst>
+            </p:cNvPr>
+            <p:cNvGrpSpPr/>
+            <p:nvPr/>
+          </p:nvGrpSpPr>
+          <p:grpSpPr>
+            <a:xfrm>
+              <a:off x="819308" y="4163565"/>
+              <a:ext cx="8270905" cy="1437936"/>
+              <a:chOff x="442789" y="3684494"/>
+              <a:chExt cx="9149446" cy="1590675"/>
+            </a:xfrm>
+          </p:grpSpPr>
+          <p:pic>
+            <p:nvPicPr>
+              <p:cNvPr id="3074" name="Picture 2">
+                <a:extLst>
+                  <a:ext uri="{FF2B5EF4-FFF2-40B4-BE49-F238E27FC236}">
+                    <a16:creationId xmlns:a16="http://schemas.microsoft.com/office/drawing/2014/main" id="{1057B144-E554-EE9C-E366-2173BEBA3BB6}"/>
+                  </a:ext>
+                </a:extLst>
+              </p:cNvPr>
+              <p:cNvPicPr>
+                <a:picLocks noChangeAspect="1" noChangeArrowheads="1"/>
+              </p:cNvPicPr>
+              <p:nvPr/>
+            </p:nvPicPr>
+            <p:blipFill>
+              <a:blip r:embed="rId2">
+                <a:extLst>
+                  <a:ext uri="{28A0092B-C50C-407E-A947-70E740481C1C}">
+                    <a14:useLocalDpi xmlns:a14="http://schemas.microsoft.com/office/drawing/2010/main" val="0"/>
+                  </a:ext>
+                </a:extLst>
+              </a:blip>
+              <a:srcRect/>
+              <a:stretch>
+                <a:fillRect/>
+              </a:stretch>
+            </p:blipFill>
+            <p:spPr bwMode="auto">
+              <a:xfrm>
+                <a:off x="630158" y="3938494"/>
+                <a:ext cx="8734178" cy="1082674"/>
+              </a:xfrm>
+              <a:prstGeom prst="rect">
+                <a:avLst/>
+              </a:prstGeom>
+              <a:noFill/>
+              <a:extLst>
+                <a:ext uri="{909E8E84-426E-40DD-AFC4-6F175D3DCCD1}">
+                  <a14:hiddenFill xmlns:a14="http://schemas.microsoft.com/office/drawing/2010/main">
+                    <a:solidFill>
+                      <a:srgbClr val="FFFFFF"/>
+                    </a:solidFill>
+                  </a14:hiddenFill>
+                </a:ext>
+              </a:extLst>
+            </p:spPr>
+          </p:pic>
+          <p:sp>
+            <p:nvSpPr>
+              <p:cNvPr id="8" name="Rectangle 7">
+                <a:extLst>
+                  <a:ext uri="{FF2B5EF4-FFF2-40B4-BE49-F238E27FC236}">
+                    <a16:creationId xmlns:a16="http://schemas.microsoft.com/office/drawing/2014/main" id="{C780BF9D-F20C-69A4-9A34-8219D7573100}"/>
+                  </a:ext>
+                </a:extLst>
+              </p:cNvPr>
+              <p:cNvSpPr/>
+              <p:nvPr/>
+            </p:nvSpPr>
+            <p:spPr>
+              <a:xfrm>
+                <a:off x="442789" y="3684494"/>
+                <a:ext cx="9149446" cy="1590675"/>
+              </a:xfrm>
+              <a:prstGeom prst="rect">
+                <a:avLst/>
+              </a:prstGeom>
+              <a:noFill/>
+              <a:ln w="57150">
+                <a:solidFill>
+                  <a:srgbClr val="0070C0"/>
+                </a:solidFill>
+              </a:ln>
+            </p:spPr>
+            <p:style>
+              <a:lnRef idx="2">
+                <a:schemeClr val="accent1">
+                  <a:shade val="50000"/>
+                </a:schemeClr>
+              </a:lnRef>
+              <a:fillRef idx="1">
+                <a:schemeClr val="accent1"/>
+              </a:fillRef>
+              <a:effectRef idx="0">
+                <a:schemeClr val="accent1"/>
+              </a:effectRef>
+              <a:fontRef idx="minor">
+                <a:schemeClr val="lt1"/>
+              </a:fontRef>
+            </p:style>
+            <p:txBody>
+              <a:bodyPr rtlCol="0" anchor="ctr"/>
+              <a:lstStyle/>
+              <a:p>
+                <a:pPr algn="ctr"/>
+                <a:endParaRPr lang="en-CA"/>
+              </a:p>
+            </p:txBody>
+          </p:sp>
+        </p:grpSp>
+        <p:sp>
+          <p:nvSpPr>
+            <p:cNvPr id="10" name="TextBox 9">
+              <a:extLst>
+                <a:ext uri="{FF2B5EF4-FFF2-40B4-BE49-F238E27FC236}">
+                  <a16:creationId xmlns:a16="http://schemas.microsoft.com/office/drawing/2014/main" id="{0951D7D6-877F-1786-760B-4150DE03BDFB}"/>
+                </a:ext>
+              </a:extLst>
+            </p:cNvPr>
+            <p:cNvSpPr txBox="1"/>
+            <p:nvPr/>
+          </p:nvSpPr>
+          <p:spPr>
+            <a:xfrm>
+              <a:off x="2617693" y="5736577"/>
+              <a:ext cx="4419600" cy="461665"/>
+            </a:xfrm>
+            <a:prstGeom prst="rect">
+              <a:avLst/>
+            </a:prstGeom>
+            <a:noFill/>
+          </p:spPr>
+          <p:txBody>
+            <a:bodyPr wrap="square" rtlCol="0">
+              <a:spAutoFit/>
+            </a:bodyPr>
+            <a:lstStyle/>
+            <a:p>
+              <a:pPr algn="ctr"/>
+              <a:r>
+                <a:rPr lang="en-CA" sz="2400" dirty="0">
+                  <a:solidFill>
+                    <a:srgbClr val="0070C0"/>
+                  </a:solidFill>
+                </a:rPr>
+                <a:t>“Custom Score”</a:t>
+              </a:r>
+            </a:p>
+          </p:txBody>
+        </p:sp>
+      </p:grpSp>
+    </p:spTree>
+    <p:extLst>
+      <p:ext uri="{BB962C8B-B14F-4D97-AF65-F5344CB8AC3E}">
+        <p14:creationId xmlns:p14="http://schemas.microsoft.com/office/powerpoint/2010/main" val="2003425797"/>
+      </p:ext>
+    </p:extLst>
+  </p:cSld>
+  <p:clrMapOvr>
+    <a:masterClrMapping/>
+  </p:clrMapOvr>
+  <p:timing>
+    <p:tnLst>
+      <p:par>
+        <p:cTn id="1" dur="indefinite" restart="never" nodeType="tmRoot">
+          <p:childTnLst>
+            <p:seq concurrent="1" nextAc="seek">
+              <p:cTn id="2" dur="indefinite" nodeType="mainSeq">
+                <p:childTnLst>
+                  <p:par>
+                    <p:cTn id="3" fill="hold">
+                      <p:stCondLst>
+                        <p:cond delay="indefinite"/>
+                      </p:stCondLst>
+                      <p:childTnLst>
+                        <p:par>
+                          <p:cTn id="4" fill="hold">
+                            <p:stCondLst>
+                              <p:cond delay="0"/>
+                            </p:stCondLst>
+                            <p:childTnLst>
+                              <p:par>
+                                <p:cTn id="5" presetID="1" presetClass="entr" presetSubtype="0" fill="hold" nodeType="clickEffect">
+                                  <p:stCondLst>
+                                    <p:cond delay="0"/>
+                                  </p:stCondLst>
+                                  <p:childTnLst>
+                                    <p:set>
+                                      <p:cBhvr>
+                                        <p:cTn id="6" dur="1" fill="hold">
+                                          <p:stCondLst>
+                                            <p:cond delay="0"/>
+                                          </p:stCondLst>
+                                        </p:cTn>
+                                        <p:tgtEl>
+                                          <p:spTgt spid="6">
+                                            <p:txEl>
+                                              <p:pRg st="0" end="0"/>
+                                            </p:txEl>
+                                          </p:spTgt>
+                                        </p:tgtEl>
+                                        <p:attrNameLst>
+                                          <p:attrName>style.visibility</p:attrName>
+                                        </p:attrNameLst>
+                                      </p:cBhvr>
+                                      <p:to>
+                                        <p:strVal val="visible"/>
+                                      </p:to>
+                                    </p:set>
+                                  </p:childTnLst>
+                                </p:cTn>
+                              </p:par>
+                            </p:childTnLst>
+                          </p:cTn>
+                        </p:par>
+                      </p:childTnLst>
+                    </p:cTn>
+                  </p:par>
+                  <p:par>
+                    <p:cTn id="7" fill="hold">
+                      <p:stCondLst>
+                        <p:cond delay="indefinite"/>
+                      </p:stCondLst>
+                      <p:childTnLst>
+                        <p:par>
+                          <p:cTn id="8" fill="hold">
+                            <p:stCondLst>
+                              <p:cond delay="0"/>
+                            </p:stCondLst>
+                            <p:childTnLst>
+                              <p:par>
+                                <p:cTn id="9" presetID="1" presetClass="entr" presetSubtype="0" fill="hold" nodeType="clickEffect">
+                                  <p:stCondLst>
+                                    <p:cond delay="0"/>
+                                  </p:stCondLst>
+                                  <p:childTnLst>
+                                    <p:set>
+                                      <p:cBhvr>
+                                        <p:cTn id="10" dur="1" fill="hold">
+                                          <p:stCondLst>
+                                            <p:cond delay="0"/>
+                                          </p:stCondLst>
+                                        </p:cTn>
+                                        <p:tgtEl>
+                                          <p:spTgt spid="6">
+                                            <p:txEl>
+                                              <p:pRg st="1" end="1"/>
+                                            </p:txEl>
+                                          </p:spTgt>
+                                        </p:tgtEl>
+                                        <p:attrNameLst>
+                                          <p:attrName>style.visibility</p:attrName>
+                                        </p:attrNameLst>
+                                      </p:cBhvr>
+                                      <p:to>
+                                        <p:strVal val="visible"/>
+                                      </p:to>
+                                    </p:set>
+                                  </p:childTnLst>
+                                </p:cTn>
+                              </p:par>
+                            </p:childTnLst>
+                          </p:cTn>
+                        </p:par>
+                      </p:childTnLst>
+                    </p:cTn>
+                  </p:par>
+                  <p:par>
+                    <p:cTn id="11" fill="hold">
+                      <p:stCondLst>
+                        <p:cond delay="indefinite"/>
+                      </p:stCondLst>
+                      <p:childTnLst>
+                        <p:par>
+                          <p:cTn id="12" fill="hold">
+                            <p:stCondLst>
+                              <p:cond delay="0"/>
+                            </p:stCondLst>
+                            <p:childTnLst>
+                              <p:par>
+                                <p:cTn id="13" presetID="1" presetClass="entr" presetSubtype="0" fill="hold" nodeType="clickEffect">
+                                  <p:stCondLst>
+                                    <p:cond delay="0"/>
+                                  </p:stCondLst>
+                                  <p:childTnLst>
+                                    <p:set>
+                                      <p:cBhvr>
+                                        <p:cTn id="14" dur="1" fill="hold">
+                                          <p:stCondLst>
+                                            <p:cond delay="0"/>
+                                          </p:stCondLst>
+                                        </p:cTn>
+                                        <p:tgtEl>
+                                          <p:spTgt spid="6">
+                                            <p:txEl>
+                                              <p:pRg st="2" end="2"/>
+                                            </p:txEl>
+                                          </p:spTgt>
+                                        </p:tgtEl>
+                                        <p:attrNameLst>
+                                          <p:attrName>style.visibility</p:attrName>
+                                        </p:attrNameLst>
+                                      </p:cBhvr>
+                                      <p:to>
+                                        <p:strVal val="visible"/>
+                                      </p:to>
+                                    </p:set>
+                                  </p:childTnLst>
+                                </p:cTn>
+                              </p:par>
+                            </p:childTnLst>
+                          </p:cTn>
+                        </p:par>
+                      </p:childTnLst>
+                    </p:cTn>
+                  </p:par>
+                </p:childTnLst>
+              </p:cTn>
+              <p:prevCondLst>
+                <p:cond evt="onPrev" delay="0">
+                  <p:tgtEl>
+                    <p:sldTgt/>
+                  </p:tgtEl>
+                </p:cond>
+              </p:prevCondLst>
+              <p:nextCondLst>
+                <p:cond evt="onNext" delay="0">
+                  <p:tgtEl>
+                    <p:sldTgt/>
+                  </p:tgtEl>
+                </p:cond>
+              </p:nextCondLst>
+            </p:seq>
+          </p:childTnLst>
+        </p:cTn>
+      </p:par>
+    </p:tnLst>
+  </p:timing>
+</p:sld>
+</file>
+
+<file path=ppt/slides/slide8.xml><?xml version="1.0" encoding="utf-8"?>
+<p:sld xmlns:a="http://schemas.openxmlformats.org/drawingml/2006/main" xmlns:r="http://schemas.openxmlformats.org/officeDocument/2006/relationships" xmlns:p="http://schemas.openxmlformats.org/presentationml/2006/main">
+  <p:cSld>
+    <p:bg>
+      <p:bgPr>
+        <a:solidFill>
+          <a:schemeClr val="bg1"/>
+        </a:solidFill>
+        <a:effectLst/>
+      </p:bgPr>
+    </p:bg>
+    <p:spTree>
+      <p:nvGrpSpPr>
+        <p:cNvPr id="1" name=""/>
+        <p:cNvGrpSpPr/>
+        <p:nvPr/>
+      </p:nvGrpSpPr>
+      <p:grpSpPr>
+        <a:xfrm>
+          <a:off x="0" y="0"/>
+          <a:ext cx="0" cy="0"/>
+          <a:chOff x="0" y="0"/>
+          <a:chExt cx="0" cy="0"/>
+        </a:xfrm>
+      </p:grpSpPr>
+      <p:sp>
+        <p:nvSpPr>
+          <p:cNvPr id="2" name="Title 1">
+            <a:extLst>
+              <a:ext uri="{FF2B5EF4-FFF2-40B4-BE49-F238E27FC236}">
+                <a16:creationId xmlns:a16="http://schemas.microsoft.com/office/drawing/2014/main" id="{437B3693-1A79-34B5-944C-B789F8A7F8D5}"/>
+              </a:ext>
+            </a:extLst>
+          </p:cNvPr>
+          <p:cNvSpPr>
+            <a:spLocks noGrp="1"/>
+          </p:cNvSpPr>
+          <p:nvPr>
+            <p:ph type="title"/>
+          </p:nvPr>
+        </p:nvSpPr>
+        <p:spPr>
+          <a:xfrm>
+            <a:off x="186486" y="0"/>
+            <a:ext cx="7357336" cy="1516185"/>
+          </a:xfrm>
+        </p:spPr>
+        <p:txBody>
+          <a:bodyPr vert="horz" lIns="91440" tIns="45720" rIns="91440" bIns="45720" rtlCol="0" anchor="b">
+            <a:normAutofit/>
+          </a:bodyPr>
+          <a:lstStyle/>
+          <a:p>
+            <a:r>
+              <a:rPr lang="en-US" sz="4800" kern="1200" dirty="0">
+                <a:solidFill>
+                  <a:schemeClr val="tx1"/>
+                </a:solidFill>
+                <a:latin typeface="+mj-lt"/>
+                <a:ea typeface="+mj-ea"/>
+                <a:cs typeface="+mj-cs"/>
+              </a:rPr>
+              <a:t>Evaluating Models</a:t>
+            </a:r>
+          </a:p>
+        </p:txBody>
+      </p:sp>
+      <p:sp>
+        <p:nvSpPr>
+          <p:cNvPr id="22" name="Slide Number Placeholder 21">
+            <a:extLst>
+              <a:ext uri="{FF2B5EF4-FFF2-40B4-BE49-F238E27FC236}">
+                <a16:creationId xmlns:a16="http://schemas.microsoft.com/office/drawing/2014/main" id="{50E39E65-E39F-5C91-10B6-D5DD43AD0343}"/>
+              </a:ext>
+            </a:extLst>
+          </p:cNvPr>
+          <p:cNvSpPr>
+            <a:spLocks noGrp="1"/>
+          </p:cNvSpPr>
+          <p:nvPr>
+            <p:ph type="sldNum" sz="quarter" idx="12"/>
+          </p:nvPr>
+        </p:nvSpPr>
+        <p:spPr/>
+        <p:txBody>
+          <a:bodyPr/>
+          <a:lstStyle/>
+          <a:p>
+            <a:fld id="{783C90D1-AD4B-442F-A893-0023CEF97D6F}" type="slidenum">
+              <a:rPr lang="en-CA" smtClean="0"/>
+              <a:t>8</a:t>
+            </a:fld>
+            <a:endParaRPr lang="en-CA"/>
+          </a:p>
+        </p:txBody>
+      </p:sp>
+      <p:sp>
+        <p:nvSpPr>
+          <p:cNvPr id="6" name="Content Placeholder 2">
+            <a:extLst>
+              <a:ext uri="{FF2B5EF4-FFF2-40B4-BE49-F238E27FC236}">
+                <a16:creationId xmlns:a16="http://schemas.microsoft.com/office/drawing/2014/main" id="{75991618-05D0-F0AE-A79F-5CA7FBCB5C41}"/>
+              </a:ext>
+            </a:extLst>
+          </p:cNvPr>
+          <p:cNvSpPr>
+            <a:spLocks noGrp="1"/>
+          </p:cNvSpPr>
+          <p:nvPr>
+            <p:ph idx="1"/>
+          </p:nvPr>
+        </p:nvSpPr>
+        <p:spPr>
+          <a:xfrm>
+            <a:off x="335664" y="1801411"/>
+            <a:ext cx="8596668" cy="3880773"/>
+          </a:xfrm>
+          <a:ln>
+            <a:noFill/>
+          </a:ln>
+        </p:spPr>
+        <p:txBody>
+          <a:bodyPr/>
+          <a:lstStyle/>
+          <a:p>
+            <a:r>
+              <a:rPr lang="en-CA" b="1" dirty="0"/>
+              <a:t>Goal: </a:t>
+            </a:r>
+            <a:r>
+              <a:rPr lang="en-CA" dirty="0"/>
+              <a:t>Classify Publication Entries into 3 Tiers of Prestige, using only metrics of the authors.</a:t>
+            </a:r>
+          </a:p>
+          <a:p>
+            <a:r>
+              <a:rPr lang="en-CA" b="1" dirty="0"/>
+              <a:t>Scoring Function: </a:t>
+            </a:r>
+            <a:r>
+              <a:rPr lang="en-CA" dirty="0"/>
+              <a:t>Average of </a:t>
+            </a:r>
+            <a:r>
+              <a:rPr lang="en-CA" b="1" dirty="0">
+                <a:solidFill>
+                  <a:srgbClr val="FF0000"/>
+                </a:solidFill>
+              </a:rPr>
+              <a:t>Accuracy</a:t>
+            </a:r>
+            <a:r>
+              <a:rPr lang="en-CA" dirty="0"/>
+              <a:t> and Weighted Precision</a:t>
+            </a:r>
+          </a:p>
+          <a:p>
+            <a:pPr lvl="1"/>
+            <a:r>
+              <a:rPr lang="en-CA" dirty="0"/>
+              <a:t>Want to achieve a accurate classification while also minimizing as much false positives as much as possible.</a:t>
+            </a:r>
+          </a:p>
+        </p:txBody>
+      </p:sp>
+      <p:grpSp>
+        <p:nvGrpSpPr>
+          <p:cNvPr id="11" name="Group 10">
+            <a:extLst>
+              <a:ext uri="{FF2B5EF4-FFF2-40B4-BE49-F238E27FC236}">
+                <a16:creationId xmlns:a16="http://schemas.microsoft.com/office/drawing/2014/main" id="{9C7935C5-4E43-5F1C-2975-6FB47D9BF7D4}"/>
+              </a:ext>
+            </a:extLst>
+          </p:cNvPr>
+          <p:cNvGrpSpPr/>
+          <p:nvPr/>
+        </p:nvGrpSpPr>
+        <p:grpSpPr>
+          <a:xfrm>
+            <a:off x="819308" y="4163565"/>
+            <a:ext cx="8270905" cy="2034677"/>
+            <a:chOff x="819308" y="4163565"/>
+            <a:chExt cx="8270905" cy="2034677"/>
+          </a:xfrm>
+        </p:grpSpPr>
+        <p:grpSp>
+          <p:nvGrpSpPr>
+            <p:cNvPr id="9" name="Group 8">
+              <a:extLst>
+                <a:ext uri="{FF2B5EF4-FFF2-40B4-BE49-F238E27FC236}">
+                  <a16:creationId xmlns:a16="http://schemas.microsoft.com/office/drawing/2014/main" id="{562CC3E6-6E4F-9AA2-14B3-8BFB9E9DE9C3}"/>
+                </a:ext>
+              </a:extLst>
+            </p:cNvPr>
+            <p:cNvGrpSpPr/>
+            <p:nvPr/>
+          </p:nvGrpSpPr>
+          <p:grpSpPr>
+            <a:xfrm>
+              <a:off x="819308" y="4163565"/>
+              <a:ext cx="8270905" cy="1437936"/>
+              <a:chOff x="442789" y="3684494"/>
+              <a:chExt cx="9149446" cy="1590675"/>
+            </a:xfrm>
+          </p:grpSpPr>
+          <p:pic>
+            <p:nvPicPr>
+              <p:cNvPr id="3074" name="Picture 2">
+                <a:extLst>
+                  <a:ext uri="{FF2B5EF4-FFF2-40B4-BE49-F238E27FC236}">
+                    <a16:creationId xmlns:a16="http://schemas.microsoft.com/office/drawing/2014/main" id="{1057B144-E554-EE9C-E366-2173BEBA3BB6}"/>
+                  </a:ext>
+                </a:extLst>
+              </p:cNvPr>
+              <p:cNvPicPr>
+                <a:picLocks noChangeAspect="1" noChangeArrowheads="1"/>
+              </p:cNvPicPr>
+              <p:nvPr/>
+            </p:nvPicPr>
+            <p:blipFill>
+              <a:blip r:embed="rId2">
+                <a:extLst>
+                  <a:ext uri="{28A0092B-C50C-407E-A947-70E740481C1C}">
+                    <a14:useLocalDpi xmlns:a14="http://schemas.microsoft.com/office/drawing/2010/main" val="0"/>
+                  </a:ext>
+                </a:extLst>
+              </a:blip>
+              <a:srcRect/>
+              <a:stretch>
+                <a:fillRect/>
+              </a:stretch>
+            </p:blipFill>
+            <p:spPr bwMode="auto">
+              <a:xfrm>
+                <a:off x="630158" y="3938494"/>
+                <a:ext cx="8734178" cy="1082674"/>
+              </a:xfrm>
+              <a:prstGeom prst="rect">
+                <a:avLst/>
+              </a:prstGeom>
+              <a:noFill/>
+              <a:extLst>
+                <a:ext uri="{909E8E84-426E-40DD-AFC4-6F175D3DCCD1}">
+                  <a14:hiddenFill xmlns:a14="http://schemas.microsoft.com/office/drawing/2010/main">
+                    <a:solidFill>
+                      <a:srgbClr val="FFFFFF"/>
+                    </a:solidFill>
+                  </a14:hiddenFill>
+                </a:ext>
+              </a:extLst>
+            </p:spPr>
+          </p:pic>
+          <p:sp>
+            <p:nvSpPr>
+              <p:cNvPr id="8" name="Rectangle 7">
+                <a:extLst>
+                  <a:ext uri="{FF2B5EF4-FFF2-40B4-BE49-F238E27FC236}">
+                    <a16:creationId xmlns:a16="http://schemas.microsoft.com/office/drawing/2014/main" id="{C780BF9D-F20C-69A4-9A34-8219D7573100}"/>
+                  </a:ext>
+                </a:extLst>
+              </p:cNvPr>
+              <p:cNvSpPr/>
+              <p:nvPr/>
+            </p:nvSpPr>
+            <p:spPr>
+              <a:xfrm>
+                <a:off x="442789" y="3684494"/>
+                <a:ext cx="9149446" cy="1590675"/>
+              </a:xfrm>
+              <a:prstGeom prst="rect">
+                <a:avLst/>
+              </a:prstGeom>
+              <a:noFill/>
+              <a:ln w="57150">
+                <a:solidFill>
+                  <a:srgbClr val="0070C0"/>
+                </a:solidFill>
+              </a:ln>
+            </p:spPr>
+            <p:style>
+              <a:lnRef idx="2">
+                <a:schemeClr val="accent1">
+                  <a:shade val="50000"/>
+                </a:schemeClr>
+              </a:lnRef>
+              <a:fillRef idx="1">
+                <a:schemeClr val="accent1"/>
+              </a:fillRef>
+              <a:effectRef idx="0">
+                <a:schemeClr val="accent1"/>
+              </a:effectRef>
+              <a:fontRef idx="minor">
+                <a:schemeClr val="lt1"/>
+              </a:fontRef>
+            </p:style>
+            <p:txBody>
+              <a:bodyPr rtlCol="0" anchor="ctr"/>
+              <a:lstStyle/>
+              <a:p>
+                <a:pPr algn="ctr"/>
+                <a:endParaRPr lang="en-CA"/>
+              </a:p>
+            </p:txBody>
+          </p:sp>
+        </p:grpSp>
+        <p:sp>
+          <p:nvSpPr>
+            <p:cNvPr id="10" name="TextBox 9">
+              <a:extLst>
+                <a:ext uri="{FF2B5EF4-FFF2-40B4-BE49-F238E27FC236}">
+                  <a16:creationId xmlns:a16="http://schemas.microsoft.com/office/drawing/2014/main" id="{0951D7D6-877F-1786-760B-4150DE03BDFB}"/>
+                </a:ext>
+              </a:extLst>
+            </p:cNvPr>
+            <p:cNvSpPr txBox="1"/>
+            <p:nvPr/>
+          </p:nvSpPr>
+          <p:spPr>
+            <a:xfrm>
+              <a:off x="2617693" y="5736577"/>
+              <a:ext cx="4419600" cy="461665"/>
+            </a:xfrm>
+            <a:prstGeom prst="rect">
+              <a:avLst/>
+            </a:prstGeom>
+            <a:noFill/>
+          </p:spPr>
+          <p:txBody>
+            <a:bodyPr wrap="square" rtlCol="0">
+              <a:spAutoFit/>
+            </a:bodyPr>
+            <a:lstStyle/>
+            <a:p>
+              <a:pPr algn="ctr"/>
+              <a:r>
+                <a:rPr lang="en-CA" sz="2400" dirty="0">
+                  <a:solidFill>
+                    <a:srgbClr val="0070C0"/>
+                  </a:solidFill>
+                </a:rPr>
+                <a:t>“Custom Score”</a:t>
+              </a:r>
+            </a:p>
+          </p:txBody>
+        </p:sp>
+      </p:grpSp>
+      <p:cxnSp>
+        <p:nvCxnSpPr>
+          <p:cNvPr id="4" name="Straight Arrow Connector 3">
+            <a:extLst>
+              <a:ext uri="{FF2B5EF4-FFF2-40B4-BE49-F238E27FC236}">
+                <a16:creationId xmlns:a16="http://schemas.microsoft.com/office/drawing/2014/main" id="{D99D446D-332C-2070-6105-0418A421EFB6}"/>
+              </a:ext>
+            </a:extLst>
+          </p:cNvPr>
+          <p:cNvCxnSpPr>
+            <a:cxnSpLocks/>
+          </p:cNvCxnSpPr>
+          <p:nvPr/>
+        </p:nvCxnSpPr>
+        <p:spPr>
+          <a:xfrm flipH="1">
+            <a:off x="3442447" y="2823882"/>
+            <a:ext cx="806824" cy="1649506"/>
+          </a:xfrm>
+          <a:prstGeom prst="straightConnector1">
+            <a:avLst/>
+          </a:prstGeom>
+          <a:ln w="38100">
+            <a:tailEnd type="triangle"/>
+          </a:ln>
+        </p:spPr>
+        <p:style>
+          <a:lnRef idx="1">
+            <a:schemeClr val="dk1"/>
+          </a:lnRef>
+          <a:fillRef idx="0">
+            <a:schemeClr val="dk1"/>
+          </a:fillRef>
+          <a:effectRef idx="0">
+            <a:schemeClr val="dk1"/>
+          </a:effectRef>
+          <a:fontRef idx="minor">
+            <a:schemeClr val="tx1"/>
+          </a:fontRef>
+        </p:style>
+      </p:cxnSp>
+    </p:spTree>
+    <p:extLst>
+      <p:ext uri="{BB962C8B-B14F-4D97-AF65-F5344CB8AC3E}">
+        <p14:creationId xmlns:p14="http://schemas.microsoft.com/office/powerpoint/2010/main" val="2980655510"/>
+      </p:ext>
+    </p:extLst>
+  </p:cSld>
+  <p:clrMapOvr>
+    <a:masterClrMapping/>
+  </p:clrMapOvr>
+</p:sld>
+</file>
+
+<file path=ppt/slides/slide9.xml><?xml version="1.0" encoding="utf-8"?>
+<p:sld xmlns:a="http://schemas.openxmlformats.org/drawingml/2006/main" xmlns:r="http://schemas.openxmlformats.org/officeDocument/2006/relationships" xmlns:p="http://schemas.openxmlformats.org/presentationml/2006/main">
+  <p:cSld>
+    <p:bg>
+      <p:bgPr>
+        <a:solidFill>
+          <a:schemeClr val="bg1"/>
+        </a:solidFill>
+        <a:effectLst/>
+      </p:bgPr>
+    </p:bg>
+    <p:spTree>
+      <p:nvGrpSpPr>
+        <p:cNvPr id="1" name=""/>
+        <p:cNvGrpSpPr/>
+        <p:nvPr/>
+      </p:nvGrpSpPr>
+      <p:grpSpPr>
+        <a:xfrm>
+          <a:off x="0" y="0"/>
+          <a:ext cx="0" cy="0"/>
+          <a:chOff x="0" y="0"/>
+          <a:chExt cx="0" cy="0"/>
+        </a:xfrm>
+      </p:grpSpPr>
+      <p:sp>
+        <p:nvSpPr>
+          <p:cNvPr id="2" name="Title 1">
+            <a:extLst>
+              <a:ext uri="{FF2B5EF4-FFF2-40B4-BE49-F238E27FC236}">
+                <a16:creationId xmlns:a16="http://schemas.microsoft.com/office/drawing/2014/main" id="{437B3693-1A79-34B5-944C-B789F8A7F8D5}"/>
+              </a:ext>
+            </a:extLst>
+          </p:cNvPr>
+          <p:cNvSpPr>
+            <a:spLocks noGrp="1"/>
+          </p:cNvSpPr>
+          <p:nvPr>
+            <p:ph type="title"/>
+          </p:nvPr>
+        </p:nvSpPr>
+        <p:spPr>
+          <a:xfrm>
+            <a:off x="186486" y="0"/>
+            <a:ext cx="7357336" cy="1516185"/>
+          </a:xfrm>
+        </p:spPr>
+        <p:txBody>
+          <a:bodyPr vert="horz" lIns="91440" tIns="45720" rIns="91440" bIns="45720" rtlCol="0" anchor="b">
+            <a:normAutofit/>
+          </a:bodyPr>
+          <a:lstStyle/>
+          <a:p>
+            <a:r>
+              <a:rPr lang="en-US" sz="4800" kern="1200" dirty="0">
+                <a:solidFill>
+                  <a:schemeClr val="tx1"/>
+                </a:solidFill>
+                <a:latin typeface="+mj-lt"/>
+                <a:ea typeface="+mj-ea"/>
+                <a:cs typeface="+mj-cs"/>
+              </a:rPr>
+              <a:t>Evaluating Models</a:t>
+            </a:r>
+          </a:p>
+        </p:txBody>
+      </p:sp>
+      <p:sp>
+        <p:nvSpPr>
+          <p:cNvPr id="22" name="Slide Number Placeholder 21">
+            <a:extLst>
+              <a:ext uri="{FF2B5EF4-FFF2-40B4-BE49-F238E27FC236}">
+                <a16:creationId xmlns:a16="http://schemas.microsoft.com/office/drawing/2014/main" id="{50E39E65-E39F-5C91-10B6-D5DD43AD0343}"/>
+              </a:ext>
+            </a:extLst>
+          </p:cNvPr>
+          <p:cNvSpPr>
+            <a:spLocks noGrp="1"/>
+          </p:cNvSpPr>
+          <p:nvPr>
+            <p:ph type="sldNum" sz="quarter" idx="12"/>
+          </p:nvPr>
+        </p:nvSpPr>
+        <p:spPr/>
+        <p:txBody>
+          <a:bodyPr/>
+          <a:lstStyle/>
+          <a:p>
+            <a:fld id="{783C90D1-AD4B-442F-A893-0023CEF97D6F}" type="slidenum">
+              <a:rPr lang="en-CA" smtClean="0"/>
+              <a:t>9</a:t>
+            </a:fld>
+            <a:endParaRPr lang="en-CA"/>
+          </a:p>
+        </p:txBody>
+      </p:sp>
+      <p:sp>
+        <p:nvSpPr>
+          <p:cNvPr id="6" name="Content Placeholder 2">
+            <a:extLst>
+              <a:ext uri="{FF2B5EF4-FFF2-40B4-BE49-F238E27FC236}">
+                <a16:creationId xmlns:a16="http://schemas.microsoft.com/office/drawing/2014/main" id="{75991618-05D0-F0AE-A79F-5CA7FBCB5C41}"/>
+              </a:ext>
+            </a:extLst>
+          </p:cNvPr>
+          <p:cNvSpPr>
+            <a:spLocks noGrp="1"/>
+          </p:cNvSpPr>
+          <p:nvPr>
+            <p:ph idx="1"/>
+          </p:nvPr>
+        </p:nvSpPr>
+        <p:spPr>
+          <a:xfrm>
+            <a:off x="335664" y="1801411"/>
+            <a:ext cx="8596668" cy="3880773"/>
+          </a:xfrm>
+          <a:ln>
+            <a:noFill/>
+          </a:ln>
+        </p:spPr>
+        <p:txBody>
+          <a:bodyPr/>
+          <a:lstStyle/>
+          <a:p>
+            <a:r>
+              <a:rPr lang="en-CA" b="1" dirty="0"/>
+              <a:t>Goal: </a:t>
+            </a:r>
+            <a:r>
+              <a:rPr lang="en-CA" dirty="0"/>
+              <a:t>Classify Publication Entries into 3 Tiers of Prestige, using only metrics of the authors.</a:t>
+            </a:r>
+          </a:p>
+          <a:p>
+            <a:r>
+              <a:rPr lang="en-CA" b="1" dirty="0"/>
+              <a:t>Scoring Function: </a:t>
+            </a:r>
+            <a:r>
+              <a:rPr lang="en-CA" dirty="0"/>
+              <a:t>Average of </a:t>
+            </a:r>
+            <a:r>
+              <a:rPr lang="en-CA" b="1" dirty="0">
+                <a:solidFill>
+                  <a:srgbClr val="FF0000"/>
+                </a:solidFill>
+              </a:rPr>
+              <a:t>Accuracy</a:t>
+            </a:r>
+            <a:r>
+              <a:rPr lang="en-CA" dirty="0"/>
+              <a:t> and </a:t>
+            </a:r>
+            <a:r>
+              <a:rPr lang="en-CA" b="1" dirty="0">
+                <a:solidFill>
+                  <a:srgbClr val="FF0000"/>
+                </a:solidFill>
+              </a:rPr>
+              <a:t>Weighted Precision</a:t>
+            </a:r>
+          </a:p>
+          <a:p>
+            <a:pPr lvl="1"/>
+            <a:r>
+              <a:rPr lang="en-CA" dirty="0"/>
+              <a:t>Want to achieve a accurate classification while also minimizing as much false positives as much as possible.</a:t>
+            </a:r>
+          </a:p>
+        </p:txBody>
+      </p:sp>
+      <p:grpSp>
+        <p:nvGrpSpPr>
+          <p:cNvPr id="11" name="Group 10">
+            <a:extLst>
+              <a:ext uri="{FF2B5EF4-FFF2-40B4-BE49-F238E27FC236}">
+                <a16:creationId xmlns:a16="http://schemas.microsoft.com/office/drawing/2014/main" id="{9C7935C5-4E43-5F1C-2975-6FB47D9BF7D4}"/>
+              </a:ext>
+            </a:extLst>
+          </p:cNvPr>
+          <p:cNvGrpSpPr/>
+          <p:nvPr/>
+        </p:nvGrpSpPr>
+        <p:grpSpPr>
+          <a:xfrm>
+            <a:off x="819308" y="4163565"/>
+            <a:ext cx="8270905" cy="2034677"/>
+            <a:chOff x="819308" y="4163565"/>
+            <a:chExt cx="8270905" cy="2034677"/>
+          </a:xfrm>
+        </p:grpSpPr>
+        <p:grpSp>
+          <p:nvGrpSpPr>
+            <p:cNvPr id="9" name="Group 8">
+              <a:extLst>
+                <a:ext uri="{FF2B5EF4-FFF2-40B4-BE49-F238E27FC236}">
+                  <a16:creationId xmlns:a16="http://schemas.microsoft.com/office/drawing/2014/main" id="{562CC3E6-6E4F-9AA2-14B3-8BFB9E9DE9C3}"/>
+                </a:ext>
+              </a:extLst>
+            </p:cNvPr>
+            <p:cNvGrpSpPr/>
+            <p:nvPr/>
+          </p:nvGrpSpPr>
+          <p:grpSpPr>
+            <a:xfrm>
+              <a:off x="819308" y="4163565"/>
+              <a:ext cx="8270905" cy="1437936"/>
+              <a:chOff x="442789" y="3684494"/>
+              <a:chExt cx="9149446" cy="1590675"/>
+            </a:xfrm>
+          </p:grpSpPr>
+          <p:pic>
+            <p:nvPicPr>
+              <p:cNvPr id="3074" name="Picture 2">
+                <a:extLst>
+                  <a:ext uri="{FF2B5EF4-FFF2-40B4-BE49-F238E27FC236}">
+                    <a16:creationId xmlns:a16="http://schemas.microsoft.com/office/drawing/2014/main" id="{1057B144-E554-EE9C-E366-2173BEBA3BB6}"/>
+                  </a:ext>
+                </a:extLst>
+              </p:cNvPr>
+              <p:cNvPicPr>
+                <a:picLocks noChangeAspect="1" noChangeArrowheads="1"/>
+              </p:cNvPicPr>
+              <p:nvPr/>
+            </p:nvPicPr>
+            <p:blipFill>
+              <a:blip r:embed="rId2">
+                <a:extLst>
+                  <a:ext uri="{28A0092B-C50C-407E-A947-70E740481C1C}">
+                    <a14:useLocalDpi xmlns:a14="http://schemas.microsoft.com/office/drawing/2010/main" val="0"/>
+                  </a:ext>
+                </a:extLst>
+              </a:blip>
+              <a:srcRect/>
+              <a:stretch>
+                <a:fillRect/>
+              </a:stretch>
+            </p:blipFill>
+            <p:spPr bwMode="auto">
+              <a:xfrm>
+                <a:off x="630158" y="3938494"/>
+                <a:ext cx="8734178" cy="1082674"/>
+              </a:xfrm>
+              <a:prstGeom prst="rect">
+                <a:avLst/>
+              </a:prstGeom>
+              <a:noFill/>
+              <a:extLst>
+                <a:ext uri="{909E8E84-426E-40DD-AFC4-6F175D3DCCD1}">
+                  <a14:hiddenFill xmlns:a14="http://schemas.microsoft.com/office/drawing/2010/main">
+                    <a:solidFill>
+                      <a:srgbClr val="FFFFFF"/>
+                    </a:solidFill>
+                  </a14:hiddenFill>
+                </a:ext>
+              </a:extLst>
+            </p:spPr>
+          </p:pic>
+          <p:sp>
+            <p:nvSpPr>
+              <p:cNvPr id="8" name="Rectangle 7">
+                <a:extLst>
+                  <a:ext uri="{FF2B5EF4-FFF2-40B4-BE49-F238E27FC236}">
+                    <a16:creationId xmlns:a16="http://schemas.microsoft.com/office/drawing/2014/main" id="{C780BF9D-F20C-69A4-9A34-8219D7573100}"/>
+                  </a:ext>
+                </a:extLst>
+              </p:cNvPr>
+              <p:cNvSpPr/>
+              <p:nvPr/>
+            </p:nvSpPr>
+            <p:spPr>
+              <a:xfrm>
+                <a:off x="442789" y="3684494"/>
+                <a:ext cx="9149446" cy="1590675"/>
+              </a:xfrm>
+              <a:prstGeom prst="rect">
+                <a:avLst/>
+              </a:prstGeom>
+              <a:noFill/>
+              <a:ln w="57150">
+                <a:solidFill>
+                  <a:srgbClr val="0070C0"/>
+                </a:solidFill>
+              </a:ln>
+            </p:spPr>
+            <p:style>
+              <a:lnRef idx="2">
+                <a:schemeClr val="accent1">
+                  <a:shade val="50000"/>
+                </a:schemeClr>
+              </a:lnRef>
+              <a:fillRef idx="1">
+                <a:schemeClr val="accent1"/>
+              </a:fillRef>
+              <a:effectRef idx="0">
+                <a:schemeClr val="accent1"/>
+              </a:effectRef>
+              <a:fontRef idx="minor">
+                <a:schemeClr val="lt1"/>
+              </a:fontRef>
+            </p:style>
+            <p:txBody>
+              <a:bodyPr rtlCol="0" anchor="ctr"/>
+              <a:lstStyle/>
+              <a:p>
+                <a:pPr algn="ctr"/>
+                <a:endParaRPr lang="en-CA"/>
+              </a:p>
+            </p:txBody>
+          </p:sp>
+        </p:grpSp>
+        <p:sp>
+          <p:nvSpPr>
+            <p:cNvPr id="10" name="TextBox 9">
+              <a:extLst>
+                <a:ext uri="{FF2B5EF4-FFF2-40B4-BE49-F238E27FC236}">
+                  <a16:creationId xmlns:a16="http://schemas.microsoft.com/office/drawing/2014/main" id="{0951D7D6-877F-1786-760B-4150DE03BDFB}"/>
+                </a:ext>
+              </a:extLst>
+            </p:cNvPr>
+            <p:cNvSpPr txBox="1"/>
+            <p:nvPr/>
+          </p:nvSpPr>
+          <p:spPr>
+            <a:xfrm>
+              <a:off x="2617693" y="5736577"/>
+              <a:ext cx="4419600" cy="461665"/>
+            </a:xfrm>
+            <a:prstGeom prst="rect">
+              <a:avLst/>
+            </a:prstGeom>
+            <a:noFill/>
+          </p:spPr>
+          <p:txBody>
+            <a:bodyPr wrap="square" rtlCol="0">
+              <a:spAutoFit/>
+            </a:bodyPr>
+            <a:lstStyle/>
+            <a:p>
+              <a:pPr algn="ctr"/>
+              <a:r>
+                <a:rPr lang="en-CA" sz="2400" dirty="0">
+                  <a:solidFill>
+                    <a:srgbClr val="0070C0"/>
+                  </a:solidFill>
+                </a:rPr>
+                <a:t>“Custom Score”</a:t>
+              </a:r>
+            </a:p>
+          </p:txBody>
+        </p:sp>
+      </p:grpSp>
+      <p:cxnSp>
+        <p:nvCxnSpPr>
+          <p:cNvPr id="4" name="Straight Arrow Connector 3">
+            <a:extLst>
+              <a:ext uri="{FF2B5EF4-FFF2-40B4-BE49-F238E27FC236}">
+                <a16:creationId xmlns:a16="http://schemas.microsoft.com/office/drawing/2014/main" id="{D99D446D-332C-2070-6105-0418A421EFB6}"/>
+              </a:ext>
+            </a:extLst>
+          </p:cNvPr>
+          <p:cNvCxnSpPr>
+            <a:cxnSpLocks/>
+          </p:cNvCxnSpPr>
+          <p:nvPr/>
+        </p:nvCxnSpPr>
+        <p:spPr>
+          <a:xfrm flipH="1">
+            <a:off x="3442447" y="2823882"/>
+            <a:ext cx="806824" cy="1649506"/>
+          </a:xfrm>
+          <a:prstGeom prst="straightConnector1">
+            <a:avLst/>
+          </a:prstGeom>
+          <a:ln w="38100">
+            <a:tailEnd type="triangle"/>
+          </a:ln>
+        </p:spPr>
+        <p:style>
+          <a:lnRef idx="1">
+            <a:schemeClr val="dk1"/>
+          </a:lnRef>
+          <a:fillRef idx="0">
+            <a:schemeClr val="dk1"/>
+          </a:fillRef>
+          <a:effectRef idx="0">
+            <a:schemeClr val="dk1"/>
+          </a:effectRef>
+          <a:fontRef idx="minor">
+            <a:schemeClr val="tx1"/>
+          </a:fontRef>
+        </p:style>
+      </p:cxnSp>
+      <p:cxnSp>
+        <p:nvCxnSpPr>
+          <p:cNvPr id="5" name="Straight Arrow Connector 4">
+            <a:extLst>
+              <a:ext uri="{FF2B5EF4-FFF2-40B4-BE49-F238E27FC236}">
+                <a16:creationId xmlns:a16="http://schemas.microsoft.com/office/drawing/2014/main" id="{D52044B7-7B18-B523-023D-6C585D109FE9}"/>
+              </a:ext>
+            </a:extLst>
+          </p:cNvPr>
+          <p:cNvCxnSpPr/>
+          <p:nvPr/>
+        </p:nvCxnSpPr>
+        <p:spPr>
+          <a:xfrm>
+            <a:off x="6338047" y="2823882"/>
+            <a:ext cx="914400" cy="1649506"/>
+          </a:xfrm>
+          <a:prstGeom prst="straightConnector1">
+            <a:avLst/>
+          </a:prstGeom>
+          <a:ln w="38100">
+            <a:solidFill>
+              <a:schemeClr val="tx1"/>
+            </a:solidFill>
+            <a:tailEnd type="triangle"/>
+          </a:ln>
+        </p:spPr>
+        <p:style>
+          <a:lnRef idx="1">
+            <a:schemeClr val="accent1"/>
+          </a:lnRef>
+          <a:fillRef idx="0">
+            <a:schemeClr val="accent1"/>
+          </a:fillRef>
+          <a:effectRef idx="0">
+            <a:schemeClr val="accent1"/>
+          </a:effectRef>
+          <a:fontRef idx="minor">
+            <a:schemeClr val="tx1"/>
+          </a:fontRef>
+        </p:style>
+      </p:cxnSp>
+    </p:spTree>
+    <p:extLst>
+      <p:ext uri="{BB962C8B-B14F-4D97-AF65-F5344CB8AC3E}">
+        <p14:creationId xmlns:p14="http://schemas.microsoft.com/office/powerpoint/2010/main" val="3648547716"/>
+      </p:ext>
+    </p:extLst>
+  </p:cSld>
+  <p:clrMapOvr>
+    <a:masterClrMapping/>
+  </p:clrMapOvr>
 </p:sld>
 </file>
 
